--- a/Document/bao-ao-do-an-tot-nghiep.pptx
+++ b/Document/bao-ao-do-an-tot-nghiep.pptx
@@ -234,7 +234,7 @@
             <a:fld id="{23CEAAF3-9831-450B-8D59-2C09DB96C8FC}" type="datetimeFigureOut">
               <a:rPr lang="en-US"/>
               <a:pPr/>
-              <a:t>5/22/2025</a:t>
+              <a:t>5/28/2025</a:t>
             </a:fld>
             <a:endParaRPr/>
           </a:p>
@@ -401,7 +401,7 @@
             <a:fld id="{2D50CD79-FC16-4410-AB61-17F26E6D3BC8}" type="datetimeFigureOut">
               <a:rPr lang="en-US"/>
               <a:pPr/>
-              <a:t>5/22/2025</a:t>
+              <a:t>5/28/2025</a:t>
             </a:fld>
             <a:endParaRPr/>
           </a:p>
@@ -1443,7 +1443,7 @@
             <a:fld id="{402B9795-92DC-40DC-A1CA-9A4B349D7824}" type="datetimeFigureOut">
               <a:rPr lang="en-US" smtClean="0"/>
               <a:pPr/>
-              <a:t>5/22/2025</a:t>
+              <a:t>5/28/2025</a:t>
             </a:fld>
             <a:endParaRPr/>
           </a:p>
@@ -1756,7 +1756,7 @@
             <a:fld id="{402B9795-92DC-40DC-A1CA-9A4B349D7824}" type="datetimeFigureOut">
               <a:rPr lang="en-US" smtClean="0"/>
               <a:pPr/>
-              <a:t>5/22/2025</a:t>
+              <a:t>5/28/2025</a:t>
             </a:fld>
             <a:endParaRPr/>
           </a:p>
@@ -1938,7 +1938,7 @@
             <a:fld id="{402B9795-92DC-40DC-A1CA-9A4B349D7824}" type="datetimeFigureOut">
               <a:rPr lang="en-US" smtClean="0"/>
               <a:pPr/>
-              <a:t>5/22/2025</a:t>
+              <a:t>5/28/2025</a:t>
             </a:fld>
             <a:endParaRPr/>
           </a:p>
@@ -2130,7 +2130,7 @@
             <a:fld id="{402B9795-92DC-40DC-A1CA-9A4B349D7824}" type="datetimeFigureOut">
               <a:rPr lang="en-US" smtClean="0"/>
               <a:pPr/>
-              <a:t>5/22/2025</a:t>
+              <a:t>5/28/2025</a:t>
             </a:fld>
             <a:endParaRPr/>
           </a:p>
@@ -2399,7 +2399,7 @@
             <a:fld id="{402B9795-92DC-40DC-A1CA-9A4B349D7824}" type="datetimeFigureOut">
               <a:rPr lang="en-US" smtClean="0"/>
               <a:pPr/>
-              <a:t>5/22/2025</a:t>
+              <a:t>5/28/2025</a:t>
             </a:fld>
             <a:endParaRPr/>
           </a:p>
@@ -3386,7 +3386,7 @@
             <a:fld id="{402B9795-92DC-40DC-A1CA-9A4B349D7824}" type="datetimeFigureOut">
               <a:rPr lang="en-US" smtClean="0"/>
               <a:pPr/>
-              <a:t>5/22/2025</a:t>
+              <a:t>5/28/2025</a:t>
             </a:fld>
             <a:endParaRPr/>
           </a:p>
@@ -3695,7 +3695,7 @@
             <a:fld id="{402B9795-92DC-40DC-A1CA-9A4B349D7824}" type="datetimeFigureOut">
               <a:rPr lang="en-US" smtClean="0"/>
               <a:pPr/>
-              <a:t>5/22/2025</a:t>
+              <a:t>5/28/2025</a:t>
             </a:fld>
             <a:endParaRPr/>
           </a:p>
@@ -4074,7 +4074,7 @@
             <a:fld id="{402B9795-92DC-40DC-A1CA-9A4B349D7824}" type="datetimeFigureOut">
               <a:rPr lang="en-US" smtClean="0"/>
               <a:pPr/>
-              <a:t>5/22/2025</a:t>
+              <a:t>5/28/2025</a:t>
             </a:fld>
             <a:endParaRPr/>
           </a:p>
@@ -4205,7 +4205,7 @@
             <a:fld id="{402B9795-92DC-40DC-A1CA-9A4B349D7824}" type="datetimeFigureOut">
               <a:rPr lang="en-US" smtClean="0"/>
               <a:pPr/>
-              <a:t>5/22/2025</a:t>
+              <a:t>5/28/2025</a:t>
             </a:fld>
             <a:endParaRPr/>
           </a:p>
@@ -4314,7 +4314,7 @@
             <a:fld id="{402B9795-92DC-40DC-A1CA-9A4B349D7824}" type="datetimeFigureOut">
               <a:rPr lang="en-US" smtClean="0"/>
               <a:pPr/>
-              <a:t>5/22/2025</a:t>
+              <a:t>5/28/2025</a:t>
             </a:fld>
             <a:endParaRPr/>
           </a:p>
@@ -4605,7 +4605,7 @@
             <a:fld id="{402B9795-92DC-40DC-A1CA-9A4B349D7824}" type="datetimeFigureOut">
               <a:rPr lang="en-US" smtClean="0"/>
               <a:pPr/>
-              <a:t>5/22/2025</a:t>
+              <a:t>5/28/2025</a:t>
             </a:fld>
             <a:endParaRPr/>
           </a:p>
@@ -4859,7 +4859,7 @@
             <a:fld id="{402B9795-92DC-40DC-A1CA-9A4B349D7824}" type="datetimeFigureOut">
               <a:rPr lang="en-US" smtClean="0"/>
               <a:pPr/>
-              <a:t>5/22/2025</a:t>
+              <a:t>5/28/2025</a:t>
             </a:fld>
             <a:endParaRPr/>
           </a:p>
@@ -5774,11 +5774,7 @@
             </a:r>
             <a:r>
               <a:rPr lang="en-US" sz="2200" dirty="0" smtClean="0"/>
-              <a:t>: </a:t>
-            </a:r>
-            <a:r>
-              <a:rPr lang="en-US" sz="2200" dirty="0" smtClean="0"/>
-              <a:t>PGS. TS </a:t>
+              <a:t>: PGS. TS </a:t>
             </a:r>
             <a:r>
               <a:rPr lang="en-US" sz="2200" dirty="0" err="1" smtClean="0"/>
@@ -5880,15 +5876,7 @@
             </a:r>
             <a:r>
               <a:rPr lang="en-US" sz="2200" dirty="0" smtClean="0"/>
-              <a:t>:</a:t>
-            </a:r>
-            <a:r>
-              <a:rPr lang="en-US" sz="2200" dirty="0" smtClean="0"/>
-              <a:t>		</a:t>
-            </a:r>
-            <a:r>
-              <a:rPr lang="en-US" sz="2200" dirty="0" smtClean="0"/>
-              <a:t>2021601003</a:t>
+              <a:t>:		2021601003</a:t>
             </a:r>
             <a:endParaRPr lang="en-US" sz="2200" dirty="0"/>
           </a:p>
@@ -5954,27 +5942,7 @@
                 <a:latin typeface="Times New Roman" pitchFamily="18" charset="0"/>
                 <a:cs typeface="Times New Roman" pitchFamily="18" charset="0"/>
               </a:rPr>
-              <a:t>: </a:t>
-            </a:r>
-            <a:r>
-              <a:rPr lang="en-US" dirty="0" smtClean="0">
-                <a:solidFill>
-                  <a:schemeClr val="bg1"/>
-                </a:solidFill>
-                <a:latin typeface="Times New Roman" pitchFamily="18" charset="0"/>
-                <a:cs typeface="Times New Roman" pitchFamily="18" charset="0"/>
-              </a:rPr>
-              <a:t>5</a:t>
-            </a:r>
-            <a:r>
-              <a:rPr lang="en-US" dirty="0" smtClean="0">
-                <a:solidFill>
-                  <a:schemeClr val="bg1"/>
-                </a:solidFill>
-                <a:latin typeface="Times New Roman" pitchFamily="18" charset="0"/>
-                <a:cs typeface="Times New Roman" pitchFamily="18" charset="0"/>
-              </a:rPr>
-              <a:t>/2025</a:t>
+              <a:t>: 5/2025</a:t>
             </a:r>
             <a:endParaRPr lang="en-US" dirty="0">
               <a:solidFill>
@@ -6053,8 +6021,12 @@
           <a:lstStyle/>
           <a:p>
             <a:r>
+              <a:rPr lang="en-US" sz="3200" dirty="0"/>
+              <a:t>3</a:t>
+            </a:r>
+            <a:r>
               <a:rPr lang="en-US" sz="3200" dirty="0" smtClean="0"/>
-              <a:t>III. </a:t>
+              <a:t>. </a:t>
             </a:r>
             <a:r>
               <a:rPr lang="en-US" sz="3200" dirty="0" err="1" smtClean="0"/>
@@ -6099,14 +6071,14 @@
           </p:nvPr>
         </p:nvSpPr>
         <p:spPr>
-          <a:xfrm>
-            <a:off x="1104900" y="2355111"/>
-            <a:ext cx="4914900" cy="3110023"/>
+          <a:xfrm flipH="1">
+            <a:off x="443106" y="2127326"/>
+            <a:ext cx="5561471" cy="3622623"/>
           </a:xfrm>
         </p:spPr>
         <p:txBody>
           <a:bodyPr>
-            <a:normAutofit/>
+            <a:normAutofit fontScale="85000" lnSpcReduction="10000"/>
           </a:bodyPr>
           <a:lstStyle/>
           <a:p>
@@ -6116,14 +6088,7 @@
                 <a:latin typeface="Times New Roman" pitchFamily="18" charset="0"/>
                 <a:cs typeface="Times New Roman" pitchFamily="18" charset="0"/>
               </a:rPr>
-              <a:t>MySQL, </a:t>
-            </a:r>
-            <a:r>
-              <a:rPr lang="en-US" sz="2800" dirty="0" err="1" smtClean="0">
-                <a:latin typeface="Times New Roman" pitchFamily="18" charset="0"/>
-                <a:cs typeface="Times New Roman" pitchFamily="18" charset="0"/>
-              </a:rPr>
-              <a:t>AivenConsole</a:t>
+              <a:t>MySQL</a:t>
             </a:r>
             <a:endParaRPr lang="en-US" sz="2800" dirty="0" smtClean="0">
               <a:latin typeface="Times New Roman" pitchFamily="18" charset="0"/>
@@ -6144,7 +6109,14 @@
                 <a:latin typeface="Times New Roman" pitchFamily="18" charset="0"/>
                 <a:cs typeface="Times New Roman" pitchFamily="18" charset="0"/>
               </a:rPr>
-              <a:t>Java, Spring Framework</a:t>
+              <a:t>Java, Spring </a:t>
+            </a:r>
+            <a:r>
+              <a:rPr lang="en-US" sz="2800" dirty="0" smtClean="0">
+                <a:latin typeface="Times New Roman" pitchFamily="18" charset="0"/>
+                <a:cs typeface="Times New Roman" pitchFamily="18" charset="0"/>
+              </a:rPr>
+              <a:t>Framework, Android Studio</a:t>
             </a:r>
             <a:endParaRPr lang="en-US" sz="2800" dirty="0" smtClean="0">
               <a:latin typeface="Times New Roman" pitchFamily="18" charset="0"/>
@@ -6173,6 +6145,34 @@
                 <a:cs typeface="Times New Roman" pitchFamily="18" charset="0"/>
               </a:rPr>
               <a:t>Thymeleaf</a:t>
+            </a:r>
+            <a:endParaRPr lang="en-US" sz="2800" dirty="0" smtClean="0">
+              <a:latin typeface="Times New Roman" pitchFamily="18" charset="0"/>
+              <a:cs typeface="Times New Roman" pitchFamily="18" charset="0"/>
+            </a:endParaRPr>
+          </a:p>
+          <a:p>
+            <a:pPr marL="514350" indent="-514350"/>
+            <a:endParaRPr lang="en-US" sz="2800" dirty="0" smtClean="0">
+              <a:latin typeface="Times New Roman" pitchFamily="18" charset="0"/>
+              <a:cs typeface="Times New Roman" pitchFamily="18" charset="0"/>
+            </a:endParaRPr>
+          </a:p>
+          <a:p>
+            <a:pPr marL="514350" indent="-514350"/>
+            <a:r>
+              <a:rPr lang="en-US" sz="2800" dirty="0" err="1" smtClean="0">
+                <a:latin typeface="Times New Roman" pitchFamily="18" charset="0"/>
+                <a:cs typeface="Times New Roman" pitchFamily="18" charset="0"/>
+              </a:rPr>
+              <a:t>AivenConsole</a:t>
+            </a:r>
+            <a:r>
+              <a:rPr lang="en-US" sz="2800" dirty="0" smtClean="0">
+                <a:latin typeface="Times New Roman" pitchFamily="18" charset="0"/>
+                <a:cs typeface="Times New Roman" pitchFamily="18" charset="0"/>
+              </a:rPr>
+              <a:t>, AWS</a:t>
             </a:r>
             <a:endParaRPr lang="en-US" sz="2800" dirty="0">
               <a:latin typeface="Times New Roman" pitchFamily="18" charset="0"/>
@@ -6198,7 +6198,7 @@
         </p:blipFill>
         <p:spPr bwMode="auto">
           <a:xfrm>
-            <a:off x="7253860" y="4307959"/>
+            <a:off x="8770810" y="4253095"/>
             <a:ext cx="3714750" cy="1714500"/>
           </a:xfrm>
           <a:prstGeom prst="rect">
@@ -6272,6 +6272,36 @@
           </a:prstGeom>
         </p:spPr>
       </p:pic>
+      <p:pic>
+        <p:nvPicPr>
+          <p:cNvPr id="4" name="Picture 3"/>
+          <p:cNvPicPr>
+            <a:picLocks noChangeAspect="1"/>
+          </p:cNvPicPr>
+          <p:nvPr/>
+        </p:nvPicPr>
+        <p:blipFill>
+          <a:blip r:embed="rId5" cstate="print">
+            <a:extLst>
+              <a:ext uri="{28A0092B-C50C-407E-A947-70E740481C1C}">
+                <a14:useLocalDpi xmlns:a14="http://schemas.microsoft.com/office/drawing/2010/main" val="0"/>
+              </a:ext>
+            </a:extLst>
+          </a:blip>
+          <a:stretch>
+            <a:fillRect/>
+          </a:stretch>
+        </p:blipFill>
+        <p:spPr>
+          <a:xfrm>
+            <a:off x="6112035" y="4398264"/>
+            <a:ext cx="2866612" cy="1433306"/>
+          </a:xfrm>
+          <a:prstGeom prst="rect">
+            <a:avLst/>
+          </a:prstGeom>
+        </p:spPr>
+      </p:pic>
     </p:spTree>
   </p:cSld>
   <p:clrMapOvr>
@@ -6332,8 +6362,12 @@
           <a:lstStyle/>
           <a:p>
             <a:r>
+              <a:rPr lang="en-US" dirty="0"/>
+              <a:t>4</a:t>
+            </a:r>
+            <a:r>
               <a:rPr lang="en-US" dirty="0" smtClean="0"/>
-              <a:t>IV. </a:t>
+              <a:t>. </a:t>
             </a:r>
             <a:r>
               <a:rPr lang="en-US" dirty="0" err="1" smtClean="0"/>
@@ -6472,6 +6506,206 @@
           </a:p>
         </p:txBody>
       </p:sp>
+      <p:sp>
+        <p:nvSpPr>
+          <p:cNvPr id="7" name="TextBox 6"/>
+          <p:cNvSpPr txBox="1"/>
+          <p:nvPr/>
+        </p:nvSpPr>
+        <p:spPr>
+          <a:xfrm>
+            <a:off x="105402" y="5263373"/>
+            <a:ext cx="5635256" cy="369332"/>
+          </a:xfrm>
+          <a:prstGeom prst="rect">
+            <a:avLst/>
+          </a:prstGeom>
+          <a:noFill/>
+        </p:spPr>
+        <p:txBody>
+          <a:bodyPr wrap="square" rtlCol="0">
+            <a:spAutoFit/>
+          </a:bodyPr>
+          <a:lstStyle/>
+          <a:p>
+            <a:pPr algn="ctr"/>
+            <a:r>
+              <a:rPr lang="en-US" b="1" dirty="0" err="1" smtClean="0">
+                <a:latin typeface="Times New Roman" pitchFamily="18" charset="0"/>
+                <a:cs typeface="Times New Roman" pitchFamily="18" charset="0"/>
+              </a:rPr>
+              <a:t>Bảng</a:t>
+            </a:r>
+            <a:r>
+              <a:rPr lang="en-US" b="1" dirty="0" smtClean="0">
+                <a:latin typeface="Times New Roman" pitchFamily="18" charset="0"/>
+                <a:cs typeface="Times New Roman" pitchFamily="18" charset="0"/>
+              </a:rPr>
+              <a:t> 4.1 </a:t>
+            </a:r>
+            <a:r>
+              <a:rPr lang="en-US" b="1" dirty="0" err="1" smtClean="0">
+                <a:latin typeface="Times New Roman" pitchFamily="18" charset="0"/>
+                <a:cs typeface="Times New Roman" pitchFamily="18" charset="0"/>
+              </a:rPr>
+              <a:t>Thông</a:t>
+            </a:r>
+            <a:r>
+              <a:rPr lang="en-US" b="1" dirty="0" smtClean="0">
+                <a:latin typeface="Times New Roman" pitchFamily="18" charset="0"/>
+                <a:cs typeface="Times New Roman" pitchFamily="18" charset="0"/>
+              </a:rPr>
+              <a:t> tin </a:t>
+            </a:r>
+            <a:r>
+              <a:rPr lang="en-US" b="1" dirty="0" err="1" smtClean="0">
+                <a:latin typeface="Times New Roman" pitchFamily="18" charset="0"/>
+                <a:cs typeface="Times New Roman" pitchFamily="18" charset="0"/>
+              </a:rPr>
+              <a:t>kết</a:t>
+            </a:r>
+            <a:r>
+              <a:rPr lang="en-US" b="1" dirty="0" smtClean="0">
+                <a:latin typeface="Times New Roman" pitchFamily="18" charset="0"/>
+                <a:cs typeface="Times New Roman" pitchFamily="18" charset="0"/>
+              </a:rPr>
+              <a:t> </a:t>
+            </a:r>
+            <a:r>
+              <a:rPr lang="en-US" b="1" dirty="0" err="1" smtClean="0">
+                <a:latin typeface="Times New Roman" pitchFamily="18" charset="0"/>
+                <a:cs typeface="Times New Roman" pitchFamily="18" charset="0"/>
+              </a:rPr>
+              <a:t>nối</a:t>
+            </a:r>
+            <a:r>
+              <a:rPr lang="en-US" b="1" dirty="0" smtClean="0">
+                <a:latin typeface="Times New Roman" pitchFamily="18" charset="0"/>
+                <a:cs typeface="Times New Roman" pitchFamily="18" charset="0"/>
+              </a:rPr>
+              <a:t> </a:t>
+            </a:r>
+            <a:r>
+              <a:rPr lang="en-US" b="1" dirty="0" err="1" smtClean="0">
+                <a:latin typeface="Times New Roman" pitchFamily="18" charset="0"/>
+                <a:cs typeface="Times New Roman" pitchFamily="18" charset="0"/>
+              </a:rPr>
+              <a:t>tới</a:t>
+            </a:r>
+            <a:r>
+              <a:rPr lang="en-US" b="1" dirty="0" smtClean="0">
+                <a:latin typeface="Times New Roman" pitchFamily="18" charset="0"/>
+                <a:cs typeface="Times New Roman" pitchFamily="18" charset="0"/>
+              </a:rPr>
+              <a:t> database server</a:t>
+            </a:r>
+            <a:endParaRPr lang="en-US" b="1" dirty="0">
+              <a:latin typeface="Times New Roman" pitchFamily="18" charset="0"/>
+              <a:cs typeface="Times New Roman" pitchFamily="18" charset="0"/>
+            </a:endParaRPr>
+          </a:p>
+        </p:txBody>
+      </p:sp>
+      <p:sp>
+        <p:nvSpPr>
+          <p:cNvPr id="8" name="TextBox 7"/>
+          <p:cNvSpPr txBox="1"/>
+          <p:nvPr/>
+        </p:nvSpPr>
+        <p:spPr>
+          <a:xfrm>
+            <a:off x="6202423" y="5263373"/>
+            <a:ext cx="5635256" cy="369332"/>
+          </a:xfrm>
+          <a:prstGeom prst="rect">
+            <a:avLst/>
+          </a:prstGeom>
+          <a:noFill/>
+        </p:spPr>
+        <p:txBody>
+          <a:bodyPr wrap="square" rtlCol="0">
+            <a:spAutoFit/>
+          </a:bodyPr>
+          <a:lstStyle/>
+          <a:p>
+            <a:pPr algn="ctr"/>
+            <a:r>
+              <a:rPr lang="en-US" b="1" dirty="0" err="1" smtClean="0">
+                <a:latin typeface="Times New Roman" pitchFamily="18" charset="0"/>
+                <a:cs typeface="Times New Roman" pitchFamily="18" charset="0"/>
+              </a:rPr>
+              <a:t>Bảng</a:t>
+            </a:r>
+            <a:r>
+              <a:rPr lang="en-US" b="1" dirty="0" smtClean="0">
+                <a:latin typeface="Times New Roman" pitchFamily="18" charset="0"/>
+                <a:cs typeface="Times New Roman" pitchFamily="18" charset="0"/>
+              </a:rPr>
+              <a:t> 4.2 </a:t>
+            </a:r>
+            <a:r>
+              <a:rPr lang="en-US" b="1" dirty="0" err="1" smtClean="0">
+                <a:latin typeface="Times New Roman" pitchFamily="18" charset="0"/>
+                <a:cs typeface="Times New Roman" pitchFamily="18" charset="0"/>
+              </a:rPr>
+              <a:t>Thông</a:t>
+            </a:r>
+            <a:r>
+              <a:rPr lang="en-US" b="1" dirty="0" smtClean="0">
+                <a:latin typeface="Times New Roman" pitchFamily="18" charset="0"/>
+                <a:cs typeface="Times New Roman" pitchFamily="18" charset="0"/>
+              </a:rPr>
+              <a:t> tin </a:t>
+            </a:r>
+            <a:r>
+              <a:rPr lang="en-US" b="1" dirty="0" err="1" smtClean="0">
+                <a:latin typeface="Times New Roman" pitchFamily="18" charset="0"/>
+                <a:cs typeface="Times New Roman" pitchFamily="18" charset="0"/>
+              </a:rPr>
+              <a:t>kết</a:t>
+            </a:r>
+            <a:r>
+              <a:rPr lang="en-US" b="1" dirty="0" smtClean="0">
+                <a:latin typeface="Times New Roman" pitchFamily="18" charset="0"/>
+                <a:cs typeface="Times New Roman" pitchFamily="18" charset="0"/>
+              </a:rPr>
+              <a:t> </a:t>
+            </a:r>
+            <a:r>
+              <a:rPr lang="en-US" b="1" dirty="0" err="1" smtClean="0">
+                <a:latin typeface="Times New Roman" pitchFamily="18" charset="0"/>
+                <a:cs typeface="Times New Roman" pitchFamily="18" charset="0"/>
+              </a:rPr>
+              <a:t>nối</a:t>
+            </a:r>
+            <a:r>
+              <a:rPr lang="en-US" b="1" dirty="0" smtClean="0">
+                <a:latin typeface="Times New Roman" pitchFamily="18" charset="0"/>
+                <a:cs typeface="Times New Roman" pitchFamily="18" charset="0"/>
+              </a:rPr>
+              <a:t> </a:t>
+            </a:r>
+            <a:r>
+              <a:rPr lang="en-US" b="1" dirty="0" err="1" smtClean="0">
+                <a:latin typeface="Times New Roman" pitchFamily="18" charset="0"/>
+                <a:cs typeface="Times New Roman" pitchFamily="18" charset="0"/>
+              </a:rPr>
+              <a:t>tới</a:t>
+            </a:r>
+            <a:r>
+              <a:rPr lang="en-US" b="1" dirty="0" smtClean="0">
+                <a:latin typeface="Times New Roman" pitchFamily="18" charset="0"/>
+                <a:cs typeface="Times New Roman" pitchFamily="18" charset="0"/>
+              </a:rPr>
+              <a:t> web server</a:t>
+            </a:r>
+            <a:endParaRPr lang="en-US" b="1" dirty="0">
+              <a:latin typeface="Times New Roman" pitchFamily="18" charset="0"/>
+              <a:cs typeface="Times New Roman" pitchFamily="18" charset="0"/>
+            </a:endParaRPr>
+          </a:p>
+        </p:txBody>
+      </p:sp>
     </p:spTree>
   </p:cSld>
   <p:clrMapOvr>
@@ -6887,7 +7121,7 @@
         <p:spPr>
           <a:xfrm>
             <a:off x="4596271" y="6350168"/>
-            <a:ext cx="3082895" cy="338554"/>
+            <a:ext cx="3265638" cy="338554"/>
           </a:xfrm>
           <a:prstGeom prst="rect">
             <a:avLst/>
@@ -6901,104 +7135,97 @@
           <a:lstStyle/>
           <a:p>
             <a:r>
-              <a:rPr lang="en-US" sz="1600" dirty="0" err="1" smtClean="0">
+              <a:rPr lang="en-US" sz="1600" b="1" dirty="0" err="1" smtClean="0">
                 <a:latin typeface="Times New Roman" pitchFamily="18" charset="0"/>
                 <a:cs typeface="Times New Roman" pitchFamily="18" charset="0"/>
               </a:rPr>
               <a:t>Hình</a:t>
             </a:r>
             <a:r>
-              <a:rPr lang="en-US" sz="1600" dirty="0" smtClean="0">
-                <a:latin typeface="Times New Roman" pitchFamily="18" charset="0"/>
-                <a:cs typeface="Times New Roman" pitchFamily="18" charset="0"/>
-              </a:rPr>
-              <a:t> </a:t>
-            </a:r>
-            <a:r>
-              <a:rPr lang="en-US" sz="1600" dirty="0" smtClean="0">
-                <a:latin typeface="Times New Roman" pitchFamily="18" charset="0"/>
-                <a:cs typeface="Times New Roman" pitchFamily="18" charset="0"/>
-              </a:rPr>
-              <a:t>4.2 </a:t>
-            </a:r>
-            <a:r>
-              <a:rPr lang="en-US" sz="1600" dirty="0" err="1" smtClean="0">
+              <a:rPr lang="en-US" sz="1600" b="1" dirty="0" smtClean="0">
+                <a:latin typeface="Times New Roman" pitchFamily="18" charset="0"/>
+                <a:cs typeface="Times New Roman" pitchFamily="18" charset="0"/>
+              </a:rPr>
+              <a:t> 4.2 </a:t>
+            </a:r>
+            <a:r>
+              <a:rPr lang="en-US" sz="1600" b="1" dirty="0" err="1" smtClean="0">
                 <a:latin typeface="Times New Roman" pitchFamily="18" charset="0"/>
                 <a:cs typeface="Times New Roman" pitchFamily="18" charset="0"/>
               </a:rPr>
               <a:t>Giao</a:t>
             </a:r>
             <a:r>
-              <a:rPr lang="en-US" sz="1600" dirty="0" smtClean="0">
-                <a:latin typeface="Times New Roman" pitchFamily="18" charset="0"/>
-                <a:cs typeface="Times New Roman" pitchFamily="18" charset="0"/>
-              </a:rPr>
-              <a:t> </a:t>
-            </a:r>
-            <a:r>
-              <a:rPr lang="en-US" sz="1600" dirty="0" err="1" smtClean="0">
+              <a:rPr lang="en-US" sz="1600" b="1" dirty="0" smtClean="0">
+                <a:latin typeface="Times New Roman" pitchFamily="18" charset="0"/>
+                <a:cs typeface="Times New Roman" pitchFamily="18" charset="0"/>
+              </a:rPr>
+              <a:t> </a:t>
+            </a:r>
+            <a:r>
+              <a:rPr lang="en-US" sz="1600" b="1" dirty="0" err="1" smtClean="0">
                 <a:latin typeface="Times New Roman" pitchFamily="18" charset="0"/>
                 <a:cs typeface="Times New Roman" pitchFamily="18" charset="0"/>
               </a:rPr>
               <a:t>diện</a:t>
             </a:r>
             <a:r>
-              <a:rPr lang="en-US" sz="1600" dirty="0" smtClean="0">
-                <a:latin typeface="Times New Roman" pitchFamily="18" charset="0"/>
-                <a:cs typeface="Times New Roman" pitchFamily="18" charset="0"/>
-              </a:rPr>
-              <a:t> </a:t>
-            </a:r>
-            <a:r>
-              <a:rPr lang="en-US" sz="1600" dirty="0" err="1" smtClean="0">
+              <a:rPr lang="en-US" sz="1600" b="1" dirty="0" smtClean="0">
+                <a:latin typeface="Times New Roman" pitchFamily="18" charset="0"/>
+                <a:cs typeface="Times New Roman" pitchFamily="18" charset="0"/>
+              </a:rPr>
+              <a:t> </a:t>
+            </a:r>
+            <a:r>
+              <a:rPr lang="en-US" sz="1600" b="1" dirty="0" err="1" smtClean="0">
                 <a:latin typeface="Times New Roman" pitchFamily="18" charset="0"/>
                 <a:cs typeface="Times New Roman" pitchFamily="18" charset="0"/>
               </a:rPr>
               <a:t>quản</a:t>
             </a:r>
             <a:r>
-              <a:rPr lang="en-US" sz="1600" dirty="0" smtClean="0">
-                <a:latin typeface="Times New Roman" pitchFamily="18" charset="0"/>
-                <a:cs typeface="Times New Roman" pitchFamily="18" charset="0"/>
-              </a:rPr>
-              <a:t> </a:t>
-            </a:r>
-            <a:r>
-              <a:rPr lang="en-US" sz="1600" dirty="0" err="1" smtClean="0">
+              <a:rPr lang="en-US" sz="1600" b="1" dirty="0" smtClean="0">
+                <a:latin typeface="Times New Roman" pitchFamily="18" charset="0"/>
+                <a:cs typeface="Times New Roman" pitchFamily="18" charset="0"/>
+              </a:rPr>
+              <a:t> </a:t>
+            </a:r>
+            <a:r>
+              <a:rPr lang="en-US" sz="1600" b="1" dirty="0" err="1" smtClean="0">
                 <a:latin typeface="Times New Roman" pitchFamily="18" charset="0"/>
                 <a:cs typeface="Times New Roman" pitchFamily="18" charset="0"/>
               </a:rPr>
               <a:t>lý</a:t>
             </a:r>
             <a:r>
-              <a:rPr lang="en-US" sz="1600" dirty="0" smtClean="0">
-                <a:latin typeface="Times New Roman" pitchFamily="18" charset="0"/>
-                <a:cs typeface="Times New Roman" pitchFamily="18" charset="0"/>
-              </a:rPr>
-              <a:t> </a:t>
-            </a:r>
-            <a:r>
-              <a:rPr lang="en-US" sz="1600" dirty="0" err="1" smtClean="0">
+              <a:rPr lang="en-US" sz="1600" b="1" dirty="0" smtClean="0">
+                <a:latin typeface="Times New Roman" pitchFamily="18" charset="0"/>
+                <a:cs typeface="Times New Roman" pitchFamily="18" charset="0"/>
+              </a:rPr>
+              <a:t> </a:t>
+            </a:r>
+            <a:r>
+              <a:rPr lang="en-US" sz="1600" b="1" dirty="0" err="1" smtClean="0">
                 <a:latin typeface="Times New Roman" pitchFamily="18" charset="0"/>
                 <a:cs typeface="Times New Roman" pitchFamily="18" charset="0"/>
               </a:rPr>
               <a:t>thẻ</a:t>
             </a:r>
             <a:r>
-              <a:rPr lang="en-US" sz="1600" dirty="0" smtClean="0">
-                <a:latin typeface="Times New Roman" pitchFamily="18" charset="0"/>
-                <a:cs typeface="Times New Roman" pitchFamily="18" charset="0"/>
-              </a:rPr>
-              <a:t> </a:t>
-            </a:r>
-            <a:r>
-              <a:rPr lang="en-US" sz="1600" dirty="0" err="1" smtClean="0">
+              <a:rPr lang="en-US" sz="1600" b="1" dirty="0" smtClean="0">
+                <a:latin typeface="Times New Roman" pitchFamily="18" charset="0"/>
+                <a:cs typeface="Times New Roman" pitchFamily="18" charset="0"/>
+              </a:rPr>
+              <a:t> </a:t>
+            </a:r>
+            <a:r>
+              <a:rPr lang="en-US" sz="1600" b="1" dirty="0" err="1" smtClean="0">
                 <a:latin typeface="Times New Roman" pitchFamily="18" charset="0"/>
                 <a:cs typeface="Times New Roman" pitchFamily="18" charset="0"/>
               </a:rPr>
               <a:t>nhớ</a:t>
             </a:r>
-            <a:endParaRPr lang="en-US" sz="1600" dirty="0">
+            <a:endParaRPr lang="en-US" sz="1600" b="1" dirty="0">
               <a:latin typeface="Times New Roman" pitchFamily="18" charset="0"/>
               <a:cs typeface="Times New Roman" pitchFamily="18" charset="0"/>
             </a:endParaRPr>
@@ -7227,62 +7454,55 @@
           <a:lstStyle/>
           <a:p>
             <a:r>
-              <a:rPr lang="en-US" sz="1600" dirty="0" err="1" smtClean="0">
+              <a:rPr lang="en-US" sz="1600" b="1" dirty="0" err="1" smtClean="0">
                 <a:latin typeface="Times New Roman" pitchFamily="18" charset="0"/>
                 <a:cs typeface="Times New Roman" pitchFamily="18" charset="0"/>
               </a:rPr>
               <a:t>Hình</a:t>
             </a:r>
             <a:r>
-              <a:rPr lang="en-US" sz="1600" dirty="0" smtClean="0">
-                <a:latin typeface="Times New Roman" pitchFamily="18" charset="0"/>
-                <a:cs typeface="Times New Roman" pitchFamily="18" charset="0"/>
-              </a:rPr>
-              <a:t> </a:t>
-            </a:r>
-            <a:r>
-              <a:rPr lang="en-US" sz="1600" dirty="0" smtClean="0">
-                <a:latin typeface="Times New Roman" pitchFamily="18" charset="0"/>
-                <a:cs typeface="Times New Roman" pitchFamily="18" charset="0"/>
-              </a:rPr>
-              <a:t>4.3 </a:t>
-            </a:r>
-            <a:r>
-              <a:rPr lang="en-US" sz="1600" dirty="0" err="1" smtClean="0">
+              <a:rPr lang="en-US" sz="1600" b="1" dirty="0" smtClean="0">
+                <a:latin typeface="Times New Roman" pitchFamily="18" charset="0"/>
+                <a:cs typeface="Times New Roman" pitchFamily="18" charset="0"/>
+              </a:rPr>
+              <a:t> 4.3 </a:t>
+            </a:r>
+            <a:r>
+              <a:rPr lang="en-US" sz="1600" b="1" dirty="0" err="1" smtClean="0">
                 <a:latin typeface="Times New Roman" pitchFamily="18" charset="0"/>
                 <a:cs typeface="Times New Roman" pitchFamily="18" charset="0"/>
               </a:rPr>
               <a:t>Giao</a:t>
             </a:r>
             <a:r>
-              <a:rPr lang="en-US" sz="1600" dirty="0" smtClean="0">
-                <a:latin typeface="Times New Roman" pitchFamily="18" charset="0"/>
-                <a:cs typeface="Times New Roman" pitchFamily="18" charset="0"/>
-              </a:rPr>
-              <a:t> </a:t>
-            </a:r>
-            <a:r>
-              <a:rPr lang="en-US" sz="1600" dirty="0" err="1" smtClean="0">
+              <a:rPr lang="en-US" sz="1600" b="1" dirty="0" smtClean="0">
+                <a:latin typeface="Times New Roman" pitchFamily="18" charset="0"/>
+                <a:cs typeface="Times New Roman" pitchFamily="18" charset="0"/>
+              </a:rPr>
+              <a:t> </a:t>
+            </a:r>
+            <a:r>
+              <a:rPr lang="en-US" sz="1600" b="1" dirty="0" err="1" smtClean="0">
                 <a:latin typeface="Times New Roman" pitchFamily="18" charset="0"/>
                 <a:cs typeface="Times New Roman" pitchFamily="18" charset="0"/>
               </a:rPr>
               <a:t>diện</a:t>
             </a:r>
             <a:r>
-              <a:rPr lang="en-US" sz="1600" dirty="0" smtClean="0">
-                <a:latin typeface="Times New Roman" pitchFamily="18" charset="0"/>
-                <a:cs typeface="Times New Roman" pitchFamily="18" charset="0"/>
-              </a:rPr>
-              <a:t> </a:t>
-            </a:r>
-            <a:r>
-              <a:rPr lang="en-US" sz="1600" dirty="0" err="1" smtClean="0">
+              <a:rPr lang="en-US" sz="1600" b="1" dirty="0" smtClean="0">
+                <a:latin typeface="Times New Roman" pitchFamily="18" charset="0"/>
+                <a:cs typeface="Times New Roman" pitchFamily="18" charset="0"/>
+              </a:rPr>
+              <a:t> </a:t>
+            </a:r>
+            <a:r>
+              <a:rPr lang="en-US" sz="1600" b="1" dirty="0" err="1" smtClean="0">
                 <a:latin typeface="Times New Roman" pitchFamily="18" charset="0"/>
                 <a:cs typeface="Times New Roman" pitchFamily="18" charset="0"/>
               </a:rPr>
               <a:t>chính</a:t>
             </a:r>
-            <a:endParaRPr lang="en-US" sz="1600" dirty="0">
+            <a:endParaRPr lang="en-US" sz="1600" b="1" dirty="0">
               <a:latin typeface="Times New Roman" pitchFamily="18" charset="0"/>
               <a:cs typeface="Times New Roman" pitchFamily="18" charset="0"/>
             </a:endParaRPr>
@@ -7406,7 +7626,7 @@
         <p:spPr>
           <a:xfrm>
             <a:off x="5724144" y="3136166"/>
-            <a:ext cx="1825753" cy="584775"/>
+            <a:ext cx="2057866" cy="584775"/>
           </a:xfrm>
           <a:prstGeom prst="rect">
             <a:avLst/>
@@ -7420,27 +7640,20 @@
           <a:lstStyle/>
           <a:p>
             <a:r>
-              <a:rPr lang="en-US" sz="1600" dirty="0" err="1" smtClean="0">
+              <a:rPr lang="en-US" sz="1600" b="1" dirty="0" err="1" smtClean="0">
                 <a:latin typeface="Times New Roman" pitchFamily="18" charset="0"/>
                 <a:cs typeface="Times New Roman" pitchFamily="18" charset="0"/>
               </a:rPr>
               <a:t>Hình</a:t>
             </a:r>
             <a:r>
-              <a:rPr lang="en-US" sz="1600" dirty="0" smtClean="0">
-                <a:latin typeface="Times New Roman" pitchFamily="18" charset="0"/>
-                <a:cs typeface="Times New Roman" pitchFamily="18" charset="0"/>
-              </a:rPr>
-              <a:t> </a:t>
-            </a:r>
-            <a:r>
-              <a:rPr lang="en-US" sz="1600" dirty="0" smtClean="0">
-                <a:latin typeface="Times New Roman" pitchFamily="18" charset="0"/>
-                <a:cs typeface="Times New Roman" pitchFamily="18" charset="0"/>
-              </a:rPr>
-              <a:t>4.4 Navigation Drawer</a:t>
-            </a:r>
-            <a:endParaRPr lang="en-US" sz="1600" dirty="0">
+              <a:rPr lang="en-US" sz="1600" b="1" dirty="0" smtClean="0">
+                <a:latin typeface="Times New Roman" pitchFamily="18" charset="0"/>
+                <a:cs typeface="Times New Roman" pitchFamily="18" charset="0"/>
+              </a:rPr>
+              <a:t> 4.4 Navigation Drawer</a:t>
+            </a:r>
+            <a:endParaRPr lang="en-US" sz="1600" b="1" dirty="0">
               <a:latin typeface="Times New Roman" pitchFamily="18" charset="0"/>
               <a:cs typeface="Times New Roman" pitchFamily="18" charset="0"/>
             </a:endParaRPr>
@@ -7615,62 +7828,55 @@
           <a:lstStyle/>
           <a:p>
             <a:r>
-              <a:rPr lang="en-US" sz="1600" dirty="0" err="1" smtClean="0">
+              <a:rPr lang="en-US" sz="1600" b="1" dirty="0" err="1" smtClean="0">
                 <a:latin typeface="Times New Roman" pitchFamily="18" charset="0"/>
                 <a:cs typeface="Times New Roman" pitchFamily="18" charset="0"/>
               </a:rPr>
               <a:t>Hình</a:t>
             </a:r>
             <a:r>
-              <a:rPr lang="en-US" sz="1600" dirty="0" smtClean="0">
-                <a:latin typeface="Times New Roman" pitchFamily="18" charset="0"/>
-                <a:cs typeface="Times New Roman" pitchFamily="18" charset="0"/>
-              </a:rPr>
-              <a:t> </a:t>
-            </a:r>
-            <a:r>
-              <a:rPr lang="en-US" sz="1600" dirty="0" smtClean="0">
-                <a:latin typeface="Times New Roman" pitchFamily="18" charset="0"/>
-                <a:cs typeface="Times New Roman" pitchFamily="18" charset="0"/>
-              </a:rPr>
-              <a:t>4.5 </a:t>
-            </a:r>
-            <a:r>
-              <a:rPr lang="en-US" sz="1600" dirty="0" err="1" smtClean="0">
+              <a:rPr lang="en-US" sz="1600" b="1" dirty="0" smtClean="0">
+                <a:latin typeface="Times New Roman" pitchFamily="18" charset="0"/>
+                <a:cs typeface="Times New Roman" pitchFamily="18" charset="0"/>
+              </a:rPr>
+              <a:t> 4.5 </a:t>
+            </a:r>
+            <a:r>
+              <a:rPr lang="en-US" sz="1600" b="1" dirty="0" err="1" smtClean="0">
                 <a:latin typeface="Times New Roman" pitchFamily="18" charset="0"/>
                 <a:cs typeface="Times New Roman" pitchFamily="18" charset="0"/>
               </a:rPr>
               <a:t>Chế</a:t>
             </a:r>
             <a:r>
-              <a:rPr lang="en-US" sz="1600" dirty="0" smtClean="0">
-                <a:latin typeface="Times New Roman" pitchFamily="18" charset="0"/>
-                <a:cs typeface="Times New Roman" pitchFamily="18" charset="0"/>
-              </a:rPr>
-              <a:t> </a:t>
-            </a:r>
-            <a:r>
-              <a:rPr lang="en-US" sz="1600" dirty="0" err="1" smtClean="0">
+              <a:rPr lang="en-US" sz="1600" b="1" dirty="0" smtClean="0">
+                <a:latin typeface="Times New Roman" pitchFamily="18" charset="0"/>
+                <a:cs typeface="Times New Roman" pitchFamily="18" charset="0"/>
+              </a:rPr>
+              <a:t> </a:t>
+            </a:r>
+            <a:r>
+              <a:rPr lang="en-US" sz="1600" b="1" dirty="0" err="1" smtClean="0">
                 <a:latin typeface="Times New Roman" pitchFamily="18" charset="0"/>
                 <a:cs typeface="Times New Roman" pitchFamily="18" charset="0"/>
               </a:rPr>
               <a:t>độ</a:t>
             </a:r>
             <a:r>
-              <a:rPr lang="en-US" sz="1600" dirty="0" smtClean="0">
-                <a:latin typeface="Times New Roman" pitchFamily="18" charset="0"/>
-                <a:cs typeface="Times New Roman" pitchFamily="18" charset="0"/>
-              </a:rPr>
-              <a:t> </a:t>
-            </a:r>
-            <a:r>
-              <a:rPr lang="en-US" sz="1600" dirty="0" err="1" smtClean="0">
+              <a:rPr lang="en-US" sz="1600" b="1" dirty="0" smtClean="0">
+                <a:latin typeface="Times New Roman" pitchFamily="18" charset="0"/>
+                <a:cs typeface="Times New Roman" pitchFamily="18" charset="0"/>
+              </a:rPr>
+              <a:t> </a:t>
+            </a:r>
+            <a:r>
+              <a:rPr lang="en-US" sz="1600" b="1" dirty="0" err="1" smtClean="0">
                 <a:latin typeface="Times New Roman" pitchFamily="18" charset="0"/>
                 <a:cs typeface="Times New Roman" pitchFamily="18" charset="0"/>
               </a:rPr>
               <a:t>học</a:t>
             </a:r>
-            <a:endParaRPr lang="en-US" sz="1600" dirty="0">
+            <a:endParaRPr lang="en-US" sz="1600" b="1" dirty="0">
               <a:latin typeface="Times New Roman" pitchFamily="18" charset="0"/>
               <a:cs typeface="Times New Roman" pitchFamily="18" charset="0"/>
             </a:endParaRPr>
@@ -7700,48 +7906,41 @@
           <a:lstStyle/>
           <a:p>
             <a:r>
-              <a:rPr lang="en-US" sz="1600" dirty="0" err="1" smtClean="0">
+              <a:rPr lang="en-US" sz="1600" b="1" dirty="0" err="1" smtClean="0">
                 <a:latin typeface="Times New Roman" pitchFamily="18" charset="0"/>
                 <a:cs typeface="Times New Roman" pitchFamily="18" charset="0"/>
               </a:rPr>
               <a:t>Hình</a:t>
             </a:r>
             <a:r>
-              <a:rPr lang="en-US" sz="1600" dirty="0" smtClean="0">
-                <a:latin typeface="Times New Roman" pitchFamily="18" charset="0"/>
-                <a:cs typeface="Times New Roman" pitchFamily="18" charset="0"/>
-              </a:rPr>
-              <a:t> </a:t>
-            </a:r>
-            <a:r>
-              <a:rPr lang="en-US" sz="1600" dirty="0" smtClean="0">
-                <a:latin typeface="Times New Roman" pitchFamily="18" charset="0"/>
-                <a:cs typeface="Times New Roman" pitchFamily="18" charset="0"/>
-              </a:rPr>
-              <a:t>4.6 </a:t>
-            </a:r>
-            <a:r>
-              <a:rPr lang="en-US" sz="1600" dirty="0" err="1" smtClean="0">
+              <a:rPr lang="en-US" sz="1600" b="1" dirty="0" smtClean="0">
+                <a:latin typeface="Times New Roman" pitchFamily="18" charset="0"/>
+                <a:cs typeface="Times New Roman" pitchFamily="18" charset="0"/>
+              </a:rPr>
+              <a:t> 4.6 </a:t>
+            </a:r>
+            <a:r>
+              <a:rPr lang="en-US" sz="1600" b="1" dirty="0" err="1" smtClean="0">
                 <a:latin typeface="Times New Roman" pitchFamily="18" charset="0"/>
                 <a:cs typeface="Times New Roman" pitchFamily="18" charset="0"/>
               </a:rPr>
               <a:t>Thống</a:t>
             </a:r>
             <a:r>
-              <a:rPr lang="en-US" sz="1600" dirty="0" smtClean="0">
-                <a:latin typeface="Times New Roman" pitchFamily="18" charset="0"/>
-                <a:cs typeface="Times New Roman" pitchFamily="18" charset="0"/>
-              </a:rPr>
-              <a:t> </a:t>
-            </a:r>
-            <a:r>
-              <a:rPr lang="en-US" sz="1600" dirty="0" err="1" smtClean="0">
+              <a:rPr lang="en-US" sz="1600" b="1" dirty="0" smtClean="0">
+                <a:latin typeface="Times New Roman" pitchFamily="18" charset="0"/>
+                <a:cs typeface="Times New Roman" pitchFamily="18" charset="0"/>
+              </a:rPr>
+              <a:t> </a:t>
+            </a:r>
+            <a:r>
+              <a:rPr lang="en-US" sz="1600" b="1" dirty="0" err="1" smtClean="0">
                 <a:latin typeface="Times New Roman" pitchFamily="18" charset="0"/>
                 <a:cs typeface="Times New Roman" pitchFamily="18" charset="0"/>
               </a:rPr>
               <a:t>kê</a:t>
             </a:r>
-            <a:endParaRPr lang="en-US" sz="1600" dirty="0">
+            <a:endParaRPr lang="en-US" sz="1600" b="1" dirty="0">
               <a:latin typeface="Times New Roman" pitchFamily="18" charset="0"/>
               <a:cs typeface="Times New Roman" pitchFamily="18" charset="0"/>
             </a:endParaRPr>
@@ -8029,48 +8228,41 @@
           <a:lstStyle/>
           <a:p>
             <a:r>
-              <a:rPr lang="en-US" sz="1600" dirty="0" err="1" smtClean="0">
+              <a:rPr lang="en-US" sz="1600" b="1" dirty="0" err="1" smtClean="0">
                 <a:latin typeface="Times New Roman" pitchFamily="18" charset="0"/>
                 <a:cs typeface="Times New Roman" pitchFamily="18" charset="0"/>
               </a:rPr>
               <a:t>Hình</a:t>
             </a:r>
             <a:r>
-              <a:rPr lang="en-US" sz="1600" dirty="0" smtClean="0">
-                <a:latin typeface="Times New Roman" pitchFamily="18" charset="0"/>
-                <a:cs typeface="Times New Roman" pitchFamily="18" charset="0"/>
-              </a:rPr>
-              <a:t> </a:t>
-            </a:r>
-            <a:r>
-              <a:rPr lang="en-US" sz="1600" dirty="0" smtClean="0">
-                <a:latin typeface="Times New Roman" pitchFamily="18" charset="0"/>
-                <a:cs typeface="Times New Roman" pitchFamily="18" charset="0"/>
-              </a:rPr>
-              <a:t>4.7 </a:t>
-            </a:r>
-            <a:r>
-              <a:rPr lang="en-US" sz="1600" dirty="0" err="1" smtClean="0">
+              <a:rPr lang="en-US" sz="1600" b="1" dirty="0" smtClean="0">
+                <a:latin typeface="Times New Roman" pitchFamily="18" charset="0"/>
+                <a:cs typeface="Times New Roman" pitchFamily="18" charset="0"/>
+              </a:rPr>
+              <a:t> 4.7 </a:t>
+            </a:r>
+            <a:r>
+              <a:rPr lang="en-US" sz="1600" b="1" dirty="0" err="1" smtClean="0">
                 <a:latin typeface="Times New Roman" pitchFamily="18" charset="0"/>
                 <a:cs typeface="Times New Roman" pitchFamily="18" charset="0"/>
               </a:rPr>
               <a:t>Trợ</a:t>
             </a:r>
             <a:r>
-              <a:rPr lang="en-US" sz="1600" dirty="0" smtClean="0">
-                <a:latin typeface="Times New Roman" pitchFamily="18" charset="0"/>
-                <a:cs typeface="Times New Roman" pitchFamily="18" charset="0"/>
-              </a:rPr>
-              <a:t> </a:t>
-            </a:r>
-            <a:r>
-              <a:rPr lang="en-US" sz="1600" dirty="0" err="1" smtClean="0">
+              <a:rPr lang="en-US" sz="1600" b="1" dirty="0" smtClean="0">
+                <a:latin typeface="Times New Roman" pitchFamily="18" charset="0"/>
+                <a:cs typeface="Times New Roman" pitchFamily="18" charset="0"/>
+              </a:rPr>
+              <a:t> </a:t>
+            </a:r>
+            <a:r>
+              <a:rPr lang="en-US" sz="1600" b="1" dirty="0" err="1" smtClean="0">
                 <a:latin typeface="Times New Roman" pitchFamily="18" charset="0"/>
                 <a:cs typeface="Times New Roman" pitchFamily="18" charset="0"/>
               </a:rPr>
               <a:t>giúp</a:t>
             </a:r>
-            <a:endParaRPr lang="en-US" sz="1600" dirty="0">
+            <a:endParaRPr lang="en-US" sz="1600" b="1" dirty="0">
               <a:latin typeface="Times New Roman" pitchFamily="18" charset="0"/>
               <a:cs typeface="Times New Roman" pitchFamily="18" charset="0"/>
             </a:endParaRPr>
@@ -8100,48 +8292,41 @@
           <a:lstStyle/>
           <a:p>
             <a:r>
-              <a:rPr lang="en-US" sz="1600" dirty="0" err="1" smtClean="0">
+              <a:rPr lang="en-US" sz="1600" b="1" dirty="0" err="1" smtClean="0">
                 <a:latin typeface="Times New Roman" pitchFamily="18" charset="0"/>
                 <a:cs typeface="Times New Roman" pitchFamily="18" charset="0"/>
               </a:rPr>
               <a:t>Hình</a:t>
             </a:r>
             <a:r>
-              <a:rPr lang="en-US" sz="1600" dirty="0" smtClean="0">
-                <a:latin typeface="Times New Roman" pitchFamily="18" charset="0"/>
-                <a:cs typeface="Times New Roman" pitchFamily="18" charset="0"/>
-              </a:rPr>
-              <a:t> </a:t>
-            </a:r>
-            <a:r>
-              <a:rPr lang="en-US" sz="1600" dirty="0" smtClean="0">
-                <a:latin typeface="Times New Roman" pitchFamily="18" charset="0"/>
-                <a:cs typeface="Times New Roman" pitchFamily="18" charset="0"/>
-              </a:rPr>
-              <a:t>4.8 </a:t>
-            </a:r>
-            <a:r>
-              <a:rPr lang="en-US" sz="1600" dirty="0" err="1" smtClean="0">
+              <a:rPr lang="en-US" sz="1600" b="1" dirty="0" smtClean="0">
+                <a:latin typeface="Times New Roman" pitchFamily="18" charset="0"/>
+                <a:cs typeface="Times New Roman" pitchFamily="18" charset="0"/>
+              </a:rPr>
+              <a:t> 4.8 </a:t>
+            </a:r>
+            <a:r>
+              <a:rPr lang="en-US" sz="1600" b="1" dirty="0" err="1" smtClean="0">
                 <a:latin typeface="Times New Roman" pitchFamily="18" charset="0"/>
                 <a:cs typeface="Times New Roman" pitchFamily="18" charset="0"/>
               </a:rPr>
               <a:t>Ủng</a:t>
             </a:r>
             <a:r>
-              <a:rPr lang="en-US" sz="1600" dirty="0" smtClean="0">
-                <a:latin typeface="Times New Roman" pitchFamily="18" charset="0"/>
-                <a:cs typeface="Times New Roman" pitchFamily="18" charset="0"/>
-              </a:rPr>
-              <a:t> </a:t>
-            </a:r>
-            <a:r>
-              <a:rPr lang="en-US" sz="1600" dirty="0" err="1" smtClean="0">
+              <a:rPr lang="en-US" sz="1600" b="1" dirty="0" smtClean="0">
+                <a:latin typeface="Times New Roman" pitchFamily="18" charset="0"/>
+                <a:cs typeface="Times New Roman" pitchFamily="18" charset="0"/>
+              </a:rPr>
+              <a:t> </a:t>
+            </a:r>
+            <a:r>
+              <a:rPr lang="en-US" sz="1600" b="1" dirty="0" err="1" smtClean="0">
                 <a:latin typeface="Times New Roman" pitchFamily="18" charset="0"/>
                 <a:cs typeface="Times New Roman" pitchFamily="18" charset="0"/>
               </a:rPr>
               <a:t>hộ</a:t>
             </a:r>
-            <a:endParaRPr lang="en-US" sz="1600" dirty="0">
+            <a:endParaRPr lang="en-US" sz="1600" b="1" dirty="0">
               <a:latin typeface="Times New Roman" pitchFamily="18" charset="0"/>
               <a:cs typeface="Times New Roman" pitchFamily="18" charset="0"/>
             </a:endParaRPr>
@@ -8429,76 +8614,69 @@
           <a:lstStyle/>
           <a:p>
             <a:r>
-              <a:rPr lang="en-US" sz="1600" dirty="0" err="1" smtClean="0">
+              <a:rPr lang="en-US" sz="1600" b="1" dirty="0" err="1" smtClean="0">
                 <a:latin typeface="Times New Roman" pitchFamily="18" charset="0"/>
                 <a:cs typeface="Times New Roman" pitchFamily="18" charset="0"/>
               </a:rPr>
               <a:t>Hình</a:t>
             </a:r>
             <a:r>
-              <a:rPr lang="en-US" sz="1600" dirty="0" smtClean="0">
-                <a:latin typeface="Times New Roman" pitchFamily="18" charset="0"/>
-                <a:cs typeface="Times New Roman" pitchFamily="18" charset="0"/>
-              </a:rPr>
-              <a:t> </a:t>
-            </a:r>
-            <a:r>
-              <a:rPr lang="en-US" sz="1600" dirty="0" smtClean="0">
-                <a:latin typeface="Times New Roman" pitchFamily="18" charset="0"/>
-                <a:cs typeface="Times New Roman" pitchFamily="18" charset="0"/>
-              </a:rPr>
-              <a:t>4.9 </a:t>
-            </a:r>
-            <a:r>
-              <a:rPr lang="en-US" sz="1600" dirty="0" err="1" smtClean="0">
+              <a:rPr lang="en-US" sz="1600" b="1" dirty="0" smtClean="0">
+                <a:latin typeface="Times New Roman" pitchFamily="18" charset="0"/>
+                <a:cs typeface="Times New Roman" pitchFamily="18" charset="0"/>
+              </a:rPr>
+              <a:t> 4.9 </a:t>
+            </a:r>
+            <a:r>
+              <a:rPr lang="en-US" sz="1600" b="1" dirty="0" err="1" smtClean="0">
                 <a:latin typeface="Times New Roman" pitchFamily="18" charset="0"/>
                 <a:cs typeface="Times New Roman" pitchFamily="18" charset="0"/>
               </a:rPr>
               <a:t>Quản</a:t>
             </a:r>
             <a:r>
-              <a:rPr lang="en-US" sz="1600" dirty="0" smtClean="0">
-                <a:latin typeface="Times New Roman" pitchFamily="18" charset="0"/>
-                <a:cs typeface="Times New Roman" pitchFamily="18" charset="0"/>
-              </a:rPr>
-              <a:t> </a:t>
-            </a:r>
-            <a:r>
-              <a:rPr lang="en-US" sz="1600" dirty="0" err="1" smtClean="0">
+              <a:rPr lang="en-US" sz="1600" b="1" dirty="0" smtClean="0">
+                <a:latin typeface="Times New Roman" pitchFamily="18" charset="0"/>
+                <a:cs typeface="Times New Roman" pitchFamily="18" charset="0"/>
+              </a:rPr>
+              <a:t> </a:t>
+            </a:r>
+            <a:r>
+              <a:rPr lang="en-US" sz="1600" b="1" dirty="0" err="1" smtClean="0">
                 <a:latin typeface="Times New Roman" pitchFamily="18" charset="0"/>
                 <a:cs typeface="Times New Roman" pitchFamily="18" charset="0"/>
               </a:rPr>
               <a:t>lý</a:t>
             </a:r>
             <a:r>
-              <a:rPr lang="en-US" sz="1600" dirty="0" smtClean="0">
-                <a:latin typeface="Times New Roman" pitchFamily="18" charset="0"/>
-                <a:cs typeface="Times New Roman" pitchFamily="18" charset="0"/>
-              </a:rPr>
-              <a:t> </a:t>
-            </a:r>
-            <a:r>
-              <a:rPr lang="en-US" sz="1600" dirty="0" err="1" smtClean="0">
+              <a:rPr lang="en-US" sz="1600" b="1" dirty="0" smtClean="0">
+                <a:latin typeface="Times New Roman" pitchFamily="18" charset="0"/>
+                <a:cs typeface="Times New Roman" pitchFamily="18" charset="0"/>
+              </a:rPr>
+              <a:t> </a:t>
+            </a:r>
+            <a:r>
+              <a:rPr lang="en-US" sz="1600" b="1" dirty="0" err="1" smtClean="0">
                 <a:latin typeface="Times New Roman" pitchFamily="18" charset="0"/>
                 <a:cs typeface="Times New Roman" pitchFamily="18" charset="0"/>
               </a:rPr>
               <a:t>bộ</a:t>
             </a:r>
             <a:r>
-              <a:rPr lang="en-US" sz="1600" dirty="0" smtClean="0">
-                <a:latin typeface="Times New Roman" pitchFamily="18" charset="0"/>
-                <a:cs typeface="Times New Roman" pitchFamily="18" charset="0"/>
-              </a:rPr>
-              <a:t> </a:t>
-            </a:r>
-            <a:r>
-              <a:rPr lang="en-US" sz="1600" dirty="0" err="1" smtClean="0">
+              <a:rPr lang="en-US" sz="1600" b="1" dirty="0" smtClean="0">
+                <a:latin typeface="Times New Roman" pitchFamily="18" charset="0"/>
+                <a:cs typeface="Times New Roman" pitchFamily="18" charset="0"/>
+              </a:rPr>
+              <a:t> </a:t>
+            </a:r>
+            <a:r>
+              <a:rPr lang="en-US" sz="1600" b="1" dirty="0" err="1" smtClean="0">
                 <a:latin typeface="Times New Roman" pitchFamily="18" charset="0"/>
                 <a:cs typeface="Times New Roman" pitchFamily="18" charset="0"/>
               </a:rPr>
               <a:t>thẻ</a:t>
             </a:r>
-            <a:endParaRPr lang="en-US" sz="1600" dirty="0">
+            <a:endParaRPr lang="en-US" sz="1600" b="1" dirty="0">
               <a:latin typeface="Times New Roman" pitchFamily="18" charset="0"/>
               <a:cs typeface="Times New Roman" pitchFamily="18" charset="0"/>
             </a:endParaRPr>
@@ -8528,76 +8706,69 @@
           <a:lstStyle/>
           <a:p>
             <a:r>
-              <a:rPr lang="en-US" sz="1600" dirty="0" err="1" smtClean="0">
+              <a:rPr lang="en-US" sz="1600" b="1" dirty="0" err="1" smtClean="0">
                 <a:latin typeface="Times New Roman" pitchFamily="18" charset="0"/>
                 <a:cs typeface="Times New Roman" pitchFamily="18" charset="0"/>
               </a:rPr>
               <a:t>Hình</a:t>
             </a:r>
             <a:r>
-              <a:rPr lang="en-US" sz="1600" dirty="0" smtClean="0">
-                <a:latin typeface="Times New Roman" pitchFamily="18" charset="0"/>
-                <a:cs typeface="Times New Roman" pitchFamily="18" charset="0"/>
-              </a:rPr>
-              <a:t> </a:t>
-            </a:r>
-            <a:r>
-              <a:rPr lang="en-US" sz="1600" dirty="0" smtClean="0">
-                <a:latin typeface="Times New Roman" pitchFamily="18" charset="0"/>
-                <a:cs typeface="Times New Roman" pitchFamily="18" charset="0"/>
-              </a:rPr>
-              <a:t>4.10 </a:t>
-            </a:r>
-            <a:r>
-              <a:rPr lang="en-US" sz="1600" dirty="0" err="1" smtClean="0">
+              <a:rPr lang="en-US" sz="1600" b="1" dirty="0" smtClean="0">
+                <a:latin typeface="Times New Roman" pitchFamily="18" charset="0"/>
+                <a:cs typeface="Times New Roman" pitchFamily="18" charset="0"/>
+              </a:rPr>
+              <a:t> 4.10 </a:t>
+            </a:r>
+            <a:r>
+              <a:rPr lang="en-US" sz="1600" b="1" dirty="0" err="1" smtClean="0">
                 <a:latin typeface="Times New Roman" pitchFamily="18" charset="0"/>
                 <a:cs typeface="Times New Roman" pitchFamily="18" charset="0"/>
               </a:rPr>
               <a:t>Thêm</a:t>
             </a:r>
             <a:r>
-              <a:rPr lang="en-US" sz="1600" dirty="0" smtClean="0">
-                <a:latin typeface="Times New Roman" pitchFamily="18" charset="0"/>
-                <a:cs typeface="Times New Roman" pitchFamily="18" charset="0"/>
-              </a:rPr>
-              <a:t> </a:t>
-            </a:r>
-            <a:r>
-              <a:rPr lang="en-US" sz="1600" dirty="0" err="1" smtClean="0">
+              <a:rPr lang="en-US" sz="1600" b="1" dirty="0" smtClean="0">
+                <a:latin typeface="Times New Roman" pitchFamily="18" charset="0"/>
+                <a:cs typeface="Times New Roman" pitchFamily="18" charset="0"/>
+              </a:rPr>
+              <a:t> </a:t>
+            </a:r>
+            <a:r>
+              <a:rPr lang="en-US" sz="1600" b="1" dirty="0" err="1" smtClean="0">
                 <a:latin typeface="Times New Roman" pitchFamily="18" charset="0"/>
                 <a:cs typeface="Times New Roman" pitchFamily="18" charset="0"/>
               </a:rPr>
               <a:t>bộ</a:t>
             </a:r>
             <a:r>
-              <a:rPr lang="en-US" sz="1600" dirty="0" smtClean="0">
-                <a:latin typeface="Times New Roman" pitchFamily="18" charset="0"/>
-                <a:cs typeface="Times New Roman" pitchFamily="18" charset="0"/>
-              </a:rPr>
-              <a:t> </a:t>
-            </a:r>
-            <a:r>
-              <a:rPr lang="en-US" sz="1600" dirty="0" err="1" smtClean="0">
+              <a:rPr lang="en-US" sz="1600" b="1" dirty="0" smtClean="0">
+                <a:latin typeface="Times New Roman" pitchFamily="18" charset="0"/>
+                <a:cs typeface="Times New Roman" pitchFamily="18" charset="0"/>
+              </a:rPr>
+              <a:t> </a:t>
+            </a:r>
+            <a:r>
+              <a:rPr lang="en-US" sz="1600" b="1" dirty="0" err="1" smtClean="0">
                 <a:latin typeface="Times New Roman" pitchFamily="18" charset="0"/>
                 <a:cs typeface="Times New Roman" pitchFamily="18" charset="0"/>
               </a:rPr>
               <a:t>thẻ</a:t>
             </a:r>
             <a:r>
-              <a:rPr lang="en-US" sz="1600" dirty="0" smtClean="0">
-                <a:latin typeface="Times New Roman" pitchFamily="18" charset="0"/>
-                <a:cs typeface="Times New Roman" pitchFamily="18" charset="0"/>
-              </a:rPr>
-              <a:t> </a:t>
-            </a:r>
-            <a:r>
-              <a:rPr lang="en-US" sz="1600" dirty="0" err="1" smtClean="0">
+              <a:rPr lang="en-US" sz="1600" b="1" dirty="0" smtClean="0">
+                <a:latin typeface="Times New Roman" pitchFamily="18" charset="0"/>
+                <a:cs typeface="Times New Roman" pitchFamily="18" charset="0"/>
+              </a:rPr>
+              <a:t> </a:t>
+            </a:r>
+            <a:r>
+              <a:rPr lang="en-US" sz="1600" b="1" dirty="0" err="1" smtClean="0">
                 <a:latin typeface="Times New Roman" pitchFamily="18" charset="0"/>
                 <a:cs typeface="Times New Roman" pitchFamily="18" charset="0"/>
               </a:rPr>
               <a:t>mới</a:t>
             </a:r>
-            <a:endParaRPr lang="en-US" sz="1600" dirty="0">
+            <a:endParaRPr lang="en-US" sz="1600" b="1" dirty="0">
               <a:latin typeface="Times New Roman" pitchFamily="18" charset="0"/>
               <a:cs typeface="Times New Roman" pitchFamily="18" charset="0"/>
             </a:endParaRPr>
@@ -8885,76 +9056,69 @@
           <a:lstStyle/>
           <a:p>
             <a:r>
-              <a:rPr lang="en-US" sz="1600" dirty="0" err="1" smtClean="0">
+              <a:rPr lang="en-US" sz="1600" b="1" dirty="0" err="1" smtClean="0">
                 <a:latin typeface="Times New Roman" pitchFamily="18" charset="0"/>
                 <a:cs typeface="Times New Roman" pitchFamily="18" charset="0"/>
               </a:rPr>
               <a:t>Hình</a:t>
             </a:r>
             <a:r>
-              <a:rPr lang="en-US" sz="1600" dirty="0" smtClean="0">
-                <a:latin typeface="Times New Roman" pitchFamily="18" charset="0"/>
-                <a:cs typeface="Times New Roman" pitchFamily="18" charset="0"/>
-              </a:rPr>
-              <a:t> </a:t>
-            </a:r>
-            <a:r>
-              <a:rPr lang="en-US" sz="1600" dirty="0" smtClean="0">
-                <a:latin typeface="Times New Roman" pitchFamily="18" charset="0"/>
-                <a:cs typeface="Times New Roman" pitchFamily="18" charset="0"/>
-              </a:rPr>
-              <a:t>4.11 </a:t>
-            </a:r>
-            <a:r>
-              <a:rPr lang="en-US" sz="1600" dirty="0" err="1" smtClean="0">
+              <a:rPr lang="en-US" sz="1600" b="1" dirty="0" smtClean="0">
+                <a:latin typeface="Times New Roman" pitchFamily="18" charset="0"/>
+                <a:cs typeface="Times New Roman" pitchFamily="18" charset="0"/>
+              </a:rPr>
+              <a:t> 4.11 </a:t>
+            </a:r>
+            <a:r>
+              <a:rPr lang="en-US" sz="1600" b="1" dirty="0" err="1" smtClean="0">
                 <a:latin typeface="Times New Roman" pitchFamily="18" charset="0"/>
                 <a:cs typeface="Times New Roman" pitchFamily="18" charset="0"/>
               </a:rPr>
               <a:t>Quản</a:t>
             </a:r>
             <a:r>
-              <a:rPr lang="en-US" sz="1600" dirty="0" smtClean="0">
-                <a:latin typeface="Times New Roman" pitchFamily="18" charset="0"/>
-                <a:cs typeface="Times New Roman" pitchFamily="18" charset="0"/>
-              </a:rPr>
-              <a:t> </a:t>
-            </a:r>
-            <a:r>
-              <a:rPr lang="en-US" sz="1600" dirty="0" err="1" smtClean="0">
+              <a:rPr lang="en-US" sz="1600" b="1" dirty="0" smtClean="0">
+                <a:latin typeface="Times New Roman" pitchFamily="18" charset="0"/>
+                <a:cs typeface="Times New Roman" pitchFamily="18" charset="0"/>
+              </a:rPr>
+              <a:t> </a:t>
+            </a:r>
+            <a:r>
+              <a:rPr lang="en-US" sz="1600" b="1" dirty="0" err="1" smtClean="0">
                 <a:latin typeface="Times New Roman" pitchFamily="18" charset="0"/>
                 <a:cs typeface="Times New Roman" pitchFamily="18" charset="0"/>
               </a:rPr>
               <a:t>lý</a:t>
             </a:r>
             <a:r>
-              <a:rPr lang="en-US" sz="1600" dirty="0" smtClean="0">
-                <a:latin typeface="Times New Roman" pitchFamily="18" charset="0"/>
-                <a:cs typeface="Times New Roman" pitchFamily="18" charset="0"/>
-              </a:rPr>
-              <a:t> </a:t>
-            </a:r>
-            <a:r>
-              <a:rPr lang="en-US" sz="1600" dirty="0" err="1" smtClean="0">
+              <a:rPr lang="en-US" sz="1600" b="1" dirty="0" smtClean="0">
+                <a:latin typeface="Times New Roman" pitchFamily="18" charset="0"/>
+                <a:cs typeface="Times New Roman" pitchFamily="18" charset="0"/>
+              </a:rPr>
+              <a:t> </a:t>
+            </a:r>
+            <a:r>
+              <a:rPr lang="en-US" sz="1600" b="1" dirty="0" err="1" smtClean="0">
                 <a:latin typeface="Times New Roman" pitchFamily="18" charset="0"/>
                 <a:cs typeface="Times New Roman" pitchFamily="18" charset="0"/>
               </a:rPr>
               <a:t>thẻ</a:t>
             </a:r>
             <a:r>
-              <a:rPr lang="en-US" sz="1600" dirty="0" smtClean="0">
-                <a:latin typeface="Times New Roman" pitchFamily="18" charset="0"/>
-                <a:cs typeface="Times New Roman" pitchFamily="18" charset="0"/>
-              </a:rPr>
-              <a:t> </a:t>
-            </a:r>
-            <a:r>
-              <a:rPr lang="en-US" sz="1600" dirty="0" err="1" smtClean="0">
+              <a:rPr lang="en-US" sz="1600" b="1" dirty="0" smtClean="0">
+                <a:latin typeface="Times New Roman" pitchFamily="18" charset="0"/>
+                <a:cs typeface="Times New Roman" pitchFamily="18" charset="0"/>
+              </a:rPr>
+              <a:t> </a:t>
+            </a:r>
+            <a:r>
+              <a:rPr lang="en-US" sz="1600" b="1" dirty="0" err="1" smtClean="0">
                 <a:latin typeface="Times New Roman" pitchFamily="18" charset="0"/>
                 <a:cs typeface="Times New Roman" pitchFamily="18" charset="0"/>
               </a:rPr>
               <a:t>nhớ</a:t>
             </a:r>
-            <a:endParaRPr lang="en-US" sz="1600" dirty="0">
+            <a:endParaRPr lang="en-US" sz="1600" b="1" dirty="0">
               <a:latin typeface="Times New Roman" pitchFamily="18" charset="0"/>
               <a:cs typeface="Times New Roman" pitchFamily="18" charset="0"/>
             </a:endParaRPr>
@@ -8984,62 +9148,55 @@
           <a:lstStyle/>
           <a:p>
             <a:r>
-              <a:rPr lang="en-US" sz="1600" dirty="0" err="1" smtClean="0">
+              <a:rPr lang="en-US" sz="1600" b="1" dirty="0" err="1" smtClean="0">
                 <a:latin typeface="Times New Roman" pitchFamily="18" charset="0"/>
                 <a:cs typeface="Times New Roman" pitchFamily="18" charset="0"/>
               </a:rPr>
               <a:t>Hình</a:t>
             </a:r>
             <a:r>
-              <a:rPr lang="en-US" sz="1600" dirty="0" smtClean="0">
-                <a:latin typeface="Times New Roman" pitchFamily="18" charset="0"/>
-                <a:cs typeface="Times New Roman" pitchFamily="18" charset="0"/>
-              </a:rPr>
-              <a:t> </a:t>
-            </a:r>
-            <a:r>
-              <a:rPr lang="en-US" sz="1600" dirty="0" smtClean="0">
-                <a:latin typeface="Times New Roman" pitchFamily="18" charset="0"/>
-                <a:cs typeface="Times New Roman" pitchFamily="18" charset="0"/>
-              </a:rPr>
-              <a:t>4.12 </a:t>
-            </a:r>
-            <a:r>
-              <a:rPr lang="en-US" sz="1600" dirty="0" err="1" smtClean="0">
+              <a:rPr lang="en-US" sz="1600" b="1" dirty="0" smtClean="0">
+                <a:latin typeface="Times New Roman" pitchFamily="18" charset="0"/>
+                <a:cs typeface="Times New Roman" pitchFamily="18" charset="0"/>
+              </a:rPr>
+              <a:t> 4.12 </a:t>
+            </a:r>
+            <a:r>
+              <a:rPr lang="en-US" sz="1600" b="1" dirty="0" err="1" smtClean="0">
                 <a:latin typeface="Times New Roman" pitchFamily="18" charset="0"/>
                 <a:cs typeface="Times New Roman" pitchFamily="18" charset="0"/>
               </a:rPr>
               <a:t>Thêm</a:t>
             </a:r>
             <a:r>
-              <a:rPr lang="en-US" sz="1600" dirty="0" smtClean="0">
-                <a:latin typeface="Times New Roman" pitchFamily="18" charset="0"/>
-                <a:cs typeface="Times New Roman" pitchFamily="18" charset="0"/>
-              </a:rPr>
-              <a:t> </a:t>
-            </a:r>
-            <a:r>
-              <a:rPr lang="en-US" sz="1600" dirty="0" err="1" smtClean="0">
+              <a:rPr lang="en-US" sz="1600" b="1" dirty="0" smtClean="0">
+                <a:latin typeface="Times New Roman" pitchFamily="18" charset="0"/>
+                <a:cs typeface="Times New Roman" pitchFamily="18" charset="0"/>
+              </a:rPr>
+              <a:t> </a:t>
+            </a:r>
+            <a:r>
+              <a:rPr lang="en-US" sz="1600" b="1" dirty="0" err="1" smtClean="0">
                 <a:latin typeface="Times New Roman" pitchFamily="18" charset="0"/>
                 <a:cs typeface="Times New Roman" pitchFamily="18" charset="0"/>
               </a:rPr>
               <a:t>thẻ</a:t>
             </a:r>
             <a:r>
-              <a:rPr lang="en-US" sz="1600" dirty="0" smtClean="0">
-                <a:latin typeface="Times New Roman" pitchFamily="18" charset="0"/>
-                <a:cs typeface="Times New Roman" pitchFamily="18" charset="0"/>
-              </a:rPr>
-              <a:t> </a:t>
-            </a:r>
-            <a:r>
-              <a:rPr lang="en-US" sz="1600" dirty="0" err="1" smtClean="0">
+              <a:rPr lang="en-US" sz="1600" b="1" dirty="0" smtClean="0">
+                <a:latin typeface="Times New Roman" pitchFamily="18" charset="0"/>
+                <a:cs typeface="Times New Roman" pitchFamily="18" charset="0"/>
+              </a:rPr>
+              <a:t> </a:t>
+            </a:r>
+            <a:r>
+              <a:rPr lang="en-US" sz="1600" b="1" dirty="0" err="1" smtClean="0">
                 <a:latin typeface="Times New Roman" pitchFamily="18" charset="0"/>
                 <a:cs typeface="Times New Roman" pitchFamily="18" charset="0"/>
               </a:rPr>
               <a:t>nhớ</a:t>
             </a:r>
-            <a:endParaRPr lang="en-US" sz="1600" dirty="0">
+            <a:endParaRPr lang="en-US" sz="1600" b="1" dirty="0">
               <a:latin typeface="Times New Roman" pitchFamily="18" charset="0"/>
               <a:cs typeface="Times New Roman" pitchFamily="18" charset="0"/>
             </a:endParaRPr>
@@ -9221,11 +9378,18 @@
           <a:lstStyle/>
           <a:p>
             <a:r>
+              <a:rPr lang="en-US" sz="3200" dirty="0">
+                <a:latin typeface="Times New Roman" pitchFamily="18" charset="0"/>
+                <a:cs typeface="Times New Roman" pitchFamily="18" charset="0"/>
+              </a:rPr>
+              <a:t>5</a:t>
+            </a:r>
+            <a:r>
               <a:rPr lang="en-US" sz="3200" dirty="0" smtClean="0">
                 <a:latin typeface="Times New Roman" pitchFamily="18" charset="0"/>
                 <a:cs typeface="Times New Roman" pitchFamily="18" charset="0"/>
               </a:rPr>
-              <a:t>V. </a:t>
+              <a:t>. </a:t>
             </a:r>
             <a:r>
               <a:rPr lang="en-US" sz="3200" dirty="0" err="1" smtClean="0">
@@ -10575,28 +10739,14 @@
                 <a:latin typeface="Times New Roman" pitchFamily="18" charset="0"/>
                 <a:cs typeface="Times New Roman" pitchFamily="18" charset="0"/>
               </a:rPr>
-              <a:t> dung </a:t>
-            </a:r>
-            <a:r>
-              <a:rPr lang="en-US" sz="4800" dirty="0" err="1" smtClean="0">
-                <a:latin typeface="Times New Roman" pitchFamily="18" charset="0"/>
-                <a:cs typeface="Times New Roman" pitchFamily="18" charset="0"/>
-              </a:rPr>
-              <a:t>đồ</a:t>
+              <a:t> </a:t>
             </a:r>
             <a:r>
               <a:rPr lang="en-US" sz="4800" dirty="0" smtClean="0">
                 <a:latin typeface="Times New Roman" pitchFamily="18" charset="0"/>
                 <a:cs typeface="Times New Roman" pitchFamily="18" charset="0"/>
               </a:rPr>
-              <a:t> </a:t>
-            </a:r>
-            <a:r>
-              <a:rPr lang="en-US" sz="4800" dirty="0" err="1" smtClean="0">
-                <a:latin typeface="Times New Roman" pitchFamily="18" charset="0"/>
-                <a:cs typeface="Times New Roman" pitchFamily="18" charset="0"/>
-              </a:rPr>
-              <a:t>án</a:t>
+              <a:t>dung</a:t>
             </a:r>
             <a:endParaRPr lang="en-US" sz="4800" dirty="0">
               <a:latin typeface="Times New Roman" pitchFamily="18" charset="0"/>
@@ -12888,11 +13038,18 @@
           <a:lstStyle/>
           <a:p>
             <a:r>
+              <a:rPr lang="en-US" sz="3200" dirty="0">
+                <a:latin typeface="Times New Roman" pitchFamily="18" charset="0"/>
+                <a:cs typeface="Times New Roman" pitchFamily="18" charset="0"/>
+              </a:rPr>
+              <a:t>1</a:t>
+            </a:r>
+            <a:r>
               <a:rPr lang="en-US" sz="3200" dirty="0" smtClean="0">
                 <a:latin typeface="Times New Roman" pitchFamily="18" charset="0"/>
                 <a:cs typeface="Times New Roman" pitchFamily="18" charset="0"/>
               </a:rPr>
-              <a:t>I. </a:t>
+              <a:t>. </a:t>
             </a:r>
             <a:r>
               <a:rPr lang="en-US" sz="3200" dirty="0" err="1" smtClean="0">
@@ -13843,10 +14000,6 @@
               </a:rPr>
               <a:t>:</a:t>
             </a:r>
-            <a:endParaRPr lang="en-US" sz="2400" b="1" dirty="0" smtClean="0">
-              <a:latin typeface="Times New Roman" pitchFamily="18" charset="0"/>
-              <a:cs typeface="Times New Roman" pitchFamily="18" charset="0"/>
-            </a:endParaRPr>
           </a:p>
           <a:p>
             <a:pPr>
@@ -14007,10 +14160,6 @@
               </a:rPr>
               <a:t> Android.</a:t>
             </a:r>
-            <a:endParaRPr lang="en-US" sz="2400" dirty="0" smtClean="0">
-              <a:latin typeface="Times New Roman" pitchFamily="18" charset="0"/>
-              <a:cs typeface="Times New Roman" pitchFamily="18" charset="0"/>
-            </a:endParaRPr>
           </a:p>
           <a:p>
             <a:pPr>
@@ -14171,10 +14320,6 @@
               </a:rPr>
               <a:t>.</a:t>
             </a:r>
-            <a:endParaRPr lang="en-US" sz="2400" dirty="0" smtClean="0">
-              <a:latin typeface="Times New Roman" pitchFamily="18" charset="0"/>
-              <a:cs typeface="Times New Roman" pitchFamily="18" charset="0"/>
-            </a:endParaRPr>
           </a:p>
           <a:p>
             <a:pPr>
@@ -14279,10 +14424,6 @@
               </a:rPr>
               <a:t>.</a:t>
             </a:r>
-            <a:endParaRPr lang="en-US" sz="2400" dirty="0" smtClean="0">
-              <a:latin typeface="Times New Roman" pitchFamily="18" charset="0"/>
-              <a:cs typeface="Times New Roman" pitchFamily="18" charset="0"/>
-            </a:endParaRPr>
           </a:p>
           <a:p>
             <a:r>
@@ -14341,10 +14482,6 @@
               </a:rPr>
               <a:t>:</a:t>
             </a:r>
-            <a:endParaRPr lang="en-US" sz="2400" b="1" dirty="0" smtClean="0">
-              <a:latin typeface="Times New Roman" pitchFamily="18" charset="0"/>
-              <a:cs typeface="Times New Roman" pitchFamily="18" charset="0"/>
-            </a:endParaRPr>
           </a:p>
           <a:p>
             <a:pPr>
@@ -14435,10 +14572,6 @@
               </a:rPr>
               <a:t> flashcard</a:t>
             </a:r>
-            <a:endParaRPr lang="en-US" sz="2400" dirty="0" smtClean="0">
-              <a:latin typeface="Times New Roman" pitchFamily="18" charset="0"/>
-              <a:cs typeface="Times New Roman" pitchFamily="18" charset="0"/>
-            </a:endParaRPr>
           </a:p>
           <a:p>
             <a:pPr>
@@ -14582,11 +14715,18 @@
           <a:lstStyle/>
           <a:p>
             <a:r>
+              <a:rPr lang="en-US" sz="3200" dirty="0">
+                <a:latin typeface="Times New Roman" pitchFamily="18" charset="0"/>
+                <a:cs typeface="Times New Roman" pitchFamily="18" charset="0"/>
+              </a:rPr>
+              <a:t>2</a:t>
+            </a:r>
+            <a:r>
               <a:rPr lang="en-US" sz="3200" dirty="0" smtClean="0">
                 <a:latin typeface="Times New Roman" pitchFamily="18" charset="0"/>
                 <a:cs typeface="Times New Roman" pitchFamily="18" charset="0"/>
               </a:rPr>
-              <a:t>II. </a:t>
+              <a:t>. </a:t>
             </a:r>
             <a:r>
               <a:rPr lang="en-US" sz="3200" dirty="0" err="1" smtClean="0">
@@ -14731,10 +14871,6 @@
               </a:rPr>
               <a:t> use case</a:t>
             </a:r>
-            <a:endParaRPr lang="en-US" sz="2800" dirty="0" smtClean="0">
-              <a:latin typeface="Times New Roman" pitchFamily="18" charset="0"/>
-              <a:cs typeface="Times New Roman" pitchFamily="18" charset="0"/>
-            </a:endParaRPr>
           </a:p>
           <a:p>
             <a:r>
@@ -15016,69 +15152,69 @@
           <a:lstStyle/>
           <a:p>
             <a:r>
-              <a:rPr lang="en-US" sz="2400" dirty="0" err="1" smtClean="0">
+              <a:rPr lang="en-US" sz="2400" b="1" dirty="0" err="1" smtClean="0">
                 <a:latin typeface="Times New Roman" pitchFamily="18" charset="0"/>
                 <a:cs typeface="Times New Roman" pitchFamily="18" charset="0"/>
               </a:rPr>
               <a:t>Hình</a:t>
             </a:r>
             <a:r>
-              <a:rPr lang="en-US" sz="2400" dirty="0" smtClean="0">
+              <a:rPr lang="en-US" sz="2400" b="1" dirty="0" smtClean="0">
                 <a:latin typeface="Times New Roman" pitchFamily="18" charset="0"/>
                 <a:cs typeface="Times New Roman" pitchFamily="18" charset="0"/>
               </a:rPr>
               <a:t> 2.1 </a:t>
             </a:r>
             <a:r>
-              <a:rPr lang="en-US" sz="2400" dirty="0" err="1" smtClean="0">
+              <a:rPr lang="en-US" sz="2400" b="1" dirty="0" err="1" smtClean="0">
                 <a:latin typeface="Times New Roman" pitchFamily="18" charset="0"/>
                 <a:cs typeface="Times New Roman" pitchFamily="18" charset="0"/>
               </a:rPr>
               <a:t>Biểu</a:t>
             </a:r>
             <a:r>
-              <a:rPr lang="en-US" sz="2400" dirty="0" smtClean="0">
-                <a:latin typeface="Times New Roman" pitchFamily="18" charset="0"/>
-                <a:cs typeface="Times New Roman" pitchFamily="18" charset="0"/>
-              </a:rPr>
-              <a:t> </a:t>
-            </a:r>
-            <a:r>
-              <a:rPr lang="en-US" sz="2400" dirty="0" err="1" smtClean="0">
+              <a:rPr lang="en-US" sz="2400" b="1" dirty="0" smtClean="0">
+                <a:latin typeface="Times New Roman" pitchFamily="18" charset="0"/>
+                <a:cs typeface="Times New Roman" pitchFamily="18" charset="0"/>
+              </a:rPr>
+              <a:t> </a:t>
+            </a:r>
+            <a:r>
+              <a:rPr lang="en-US" sz="2400" b="1" dirty="0" err="1" smtClean="0">
                 <a:latin typeface="Times New Roman" pitchFamily="18" charset="0"/>
                 <a:cs typeface="Times New Roman" pitchFamily="18" charset="0"/>
               </a:rPr>
               <a:t>đồ</a:t>
             </a:r>
             <a:r>
-              <a:rPr lang="en-US" sz="2400" dirty="0" smtClean="0">
+              <a:rPr lang="en-US" sz="2400" b="1" dirty="0" smtClean="0">
                 <a:latin typeface="Times New Roman" pitchFamily="18" charset="0"/>
                 <a:cs typeface="Times New Roman" pitchFamily="18" charset="0"/>
               </a:rPr>
               <a:t> use case web </a:t>
             </a:r>
             <a:r>
-              <a:rPr lang="en-US" sz="2400" dirty="0" err="1" smtClean="0">
+              <a:rPr lang="en-US" sz="2400" b="1" dirty="0" err="1" smtClean="0">
                 <a:latin typeface="Times New Roman" pitchFamily="18" charset="0"/>
                 <a:cs typeface="Times New Roman" pitchFamily="18" charset="0"/>
               </a:rPr>
               <a:t>quản</a:t>
             </a:r>
             <a:r>
-              <a:rPr lang="en-US" sz="2400" dirty="0" smtClean="0">
-                <a:latin typeface="Times New Roman" pitchFamily="18" charset="0"/>
-                <a:cs typeface="Times New Roman" pitchFamily="18" charset="0"/>
-              </a:rPr>
-              <a:t> </a:t>
-            </a:r>
-            <a:r>
-              <a:rPr lang="en-US" sz="2400" dirty="0" err="1" smtClean="0">
+              <a:rPr lang="en-US" sz="2400" b="1" dirty="0" smtClean="0">
+                <a:latin typeface="Times New Roman" pitchFamily="18" charset="0"/>
+                <a:cs typeface="Times New Roman" pitchFamily="18" charset="0"/>
+              </a:rPr>
+              <a:t> </a:t>
+            </a:r>
+            <a:r>
+              <a:rPr lang="en-US" sz="2400" b="1" dirty="0" err="1" smtClean="0">
                 <a:latin typeface="Times New Roman" pitchFamily="18" charset="0"/>
                 <a:cs typeface="Times New Roman" pitchFamily="18" charset="0"/>
               </a:rPr>
               <a:t>lý</a:t>
             </a:r>
-            <a:endParaRPr lang="en-US" dirty="0"/>
+            <a:endParaRPr lang="en-US" b="1" dirty="0"/>
           </a:p>
         </p:txBody>
       </p:sp>
@@ -15260,91 +15396,84 @@
           <a:lstStyle/>
           <a:p>
             <a:r>
-              <a:rPr lang="en-US" sz="2400" dirty="0" err="1" smtClean="0">
+              <a:rPr lang="en-US" sz="2400" b="1" dirty="0" err="1" smtClean="0">
                 <a:latin typeface="Times New Roman" pitchFamily="18" charset="0"/>
                 <a:cs typeface="Times New Roman" pitchFamily="18" charset="0"/>
               </a:rPr>
               <a:t>Hình</a:t>
             </a:r>
             <a:r>
-              <a:rPr lang="en-US" sz="2400" dirty="0" smtClean="0">
-                <a:latin typeface="Times New Roman" pitchFamily="18" charset="0"/>
-                <a:cs typeface="Times New Roman" pitchFamily="18" charset="0"/>
-              </a:rPr>
-              <a:t> </a:t>
-            </a:r>
-            <a:r>
-              <a:rPr lang="en-US" sz="2400" dirty="0" smtClean="0">
-                <a:latin typeface="Times New Roman" pitchFamily="18" charset="0"/>
-                <a:cs typeface="Times New Roman" pitchFamily="18" charset="0"/>
-              </a:rPr>
-              <a:t>2.2 </a:t>
-            </a:r>
-            <a:r>
-              <a:rPr lang="en-US" sz="2400" dirty="0" err="1" smtClean="0">
+              <a:rPr lang="en-US" sz="2400" b="1" dirty="0" smtClean="0">
+                <a:latin typeface="Times New Roman" pitchFamily="18" charset="0"/>
+                <a:cs typeface="Times New Roman" pitchFamily="18" charset="0"/>
+              </a:rPr>
+              <a:t> 2.2 </a:t>
+            </a:r>
+            <a:r>
+              <a:rPr lang="en-US" sz="2400" b="1" dirty="0" err="1" smtClean="0">
                 <a:latin typeface="Times New Roman" pitchFamily="18" charset="0"/>
                 <a:cs typeface="Times New Roman" pitchFamily="18" charset="0"/>
               </a:rPr>
               <a:t>Biểu</a:t>
             </a:r>
             <a:r>
-              <a:rPr lang="en-US" sz="2400" dirty="0" smtClean="0">
-                <a:latin typeface="Times New Roman" pitchFamily="18" charset="0"/>
-                <a:cs typeface="Times New Roman" pitchFamily="18" charset="0"/>
-              </a:rPr>
-              <a:t> </a:t>
-            </a:r>
-            <a:r>
-              <a:rPr lang="en-US" sz="2400" dirty="0" err="1" smtClean="0">
+              <a:rPr lang="en-US" sz="2400" b="1" dirty="0" smtClean="0">
+                <a:latin typeface="Times New Roman" pitchFamily="18" charset="0"/>
+                <a:cs typeface="Times New Roman" pitchFamily="18" charset="0"/>
+              </a:rPr>
+              <a:t> </a:t>
+            </a:r>
+            <a:r>
+              <a:rPr lang="en-US" sz="2400" b="1" dirty="0" err="1" smtClean="0">
                 <a:latin typeface="Times New Roman" pitchFamily="18" charset="0"/>
                 <a:cs typeface="Times New Roman" pitchFamily="18" charset="0"/>
               </a:rPr>
               <a:t>đồ</a:t>
             </a:r>
             <a:r>
-              <a:rPr lang="en-US" sz="2400" dirty="0" smtClean="0">
+              <a:rPr lang="en-US" sz="2400" b="1" dirty="0" smtClean="0">
                 <a:latin typeface="Times New Roman" pitchFamily="18" charset="0"/>
                 <a:cs typeface="Times New Roman" pitchFamily="18" charset="0"/>
               </a:rPr>
               <a:t> use case </a:t>
             </a:r>
             <a:r>
-              <a:rPr lang="en-US" sz="2400" dirty="0" err="1" smtClean="0">
+              <a:rPr lang="en-US" sz="2400" b="1" dirty="0" err="1" smtClean="0">
                 <a:latin typeface="Times New Roman" pitchFamily="18" charset="0"/>
                 <a:cs typeface="Times New Roman" pitchFamily="18" charset="0"/>
               </a:rPr>
               <a:t>ứng</a:t>
             </a:r>
             <a:r>
-              <a:rPr lang="en-US" sz="2400" dirty="0" smtClean="0">
-                <a:latin typeface="Times New Roman" pitchFamily="18" charset="0"/>
-                <a:cs typeface="Times New Roman" pitchFamily="18" charset="0"/>
-              </a:rPr>
-              <a:t> </a:t>
-            </a:r>
-            <a:r>
-              <a:rPr lang="en-US" sz="2400" dirty="0" err="1" smtClean="0">
+              <a:rPr lang="en-US" sz="2400" b="1" dirty="0" smtClean="0">
+                <a:latin typeface="Times New Roman" pitchFamily="18" charset="0"/>
+                <a:cs typeface="Times New Roman" pitchFamily="18" charset="0"/>
+              </a:rPr>
+              <a:t> </a:t>
+            </a:r>
+            <a:r>
+              <a:rPr lang="en-US" sz="2400" b="1" dirty="0" err="1" smtClean="0">
                 <a:latin typeface="Times New Roman" pitchFamily="18" charset="0"/>
                 <a:cs typeface="Times New Roman" pitchFamily="18" charset="0"/>
               </a:rPr>
               <a:t>dụng</a:t>
             </a:r>
             <a:r>
-              <a:rPr lang="en-US" sz="2400" dirty="0" smtClean="0">
+              <a:rPr lang="en-US" sz="2400" b="1" dirty="0" smtClean="0">
                 <a:latin typeface="Times New Roman" pitchFamily="18" charset="0"/>
                 <a:cs typeface="Times New Roman" pitchFamily="18" charset="0"/>
               </a:rPr>
               <a:t> Android</a:t>
             </a:r>
-            <a:endParaRPr lang="en-US" dirty="0"/>
+            <a:endParaRPr lang="en-US" b="1" dirty="0"/>
           </a:p>
         </p:txBody>
       </p:sp>
       <p:pic>
         <p:nvPicPr>
-          <p:cNvPr id="2050" name="Picture 1"/>
+          <p:cNvPr id="3" name="Picture 2"/>
           <p:cNvPicPr>
-            <a:picLocks noChangeAspect="1" noChangeArrowheads="1"/>
+            <a:picLocks noChangeAspect="1"/>
           </p:cNvPicPr>
           <p:nvPr/>
         </p:nvPicPr>
@@ -15356,42 +15485,18 @@
               </a:ext>
             </a:extLst>
           </a:blip>
-          <a:srcRect/>
           <a:stretch>
             <a:fillRect/>
           </a:stretch>
         </p:blipFill>
-        <p:spPr bwMode="auto">
+        <p:spPr>
           <a:xfrm>
-            <a:off x="3950866" y="1173162"/>
-            <a:ext cx="7676796" cy="4852734"/>
+            <a:off x="3950866" y="1553340"/>
+            <a:ext cx="7808318" cy="5009229"/>
           </a:xfrm>
           <a:prstGeom prst="rect">
             <a:avLst/>
           </a:prstGeom>
-          <a:noFill/>
-          <a:ln>
-            <a:noFill/>
-          </a:ln>
-          <a:extLst>
-            <a:ext uri="{909E8E84-426E-40DD-AFC4-6F175D3DCCD1}">
-              <a14:hiddenFill xmlns:a14="http://schemas.microsoft.com/office/drawing/2010/main">
-                <a:solidFill>
-                  <a:srgbClr val="FFFFFF"/>
-                </a:solidFill>
-              </a14:hiddenFill>
-            </a:ext>
-            <a:ext uri="{91240B29-F687-4F45-9708-019B960494DF}">
-              <a14:hiddenLine xmlns:a14="http://schemas.microsoft.com/office/drawing/2010/main" w="9525">
-                <a:solidFill>
-                  <a:srgbClr val="000000"/>
-                </a:solidFill>
-                <a:miter lim="800000"/>
-                <a:headEnd/>
-                <a:tailEnd/>
-              </a14:hiddenLine>
-            </a:ext>
-          </a:extLst>
         </p:spPr>
       </p:pic>
     </p:spTree>
@@ -15574,7 +15679,7 @@
         <p:spPr>
           <a:xfrm>
             <a:off x="3079528" y="5976604"/>
-            <a:ext cx="6031425" cy="369332"/>
+            <a:ext cx="6031425" cy="646331"/>
           </a:xfrm>
           <a:prstGeom prst="rect">
             <a:avLst/>
@@ -15589,181 +15694,181 @@
           <a:p>
             <a:pPr algn="ctr"/>
             <a:r>
-              <a:rPr lang="en-US" dirty="0" err="1" smtClean="0">
+              <a:rPr lang="en-US" b="1" dirty="0" err="1" smtClean="0">
                 <a:latin typeface="Times New Roman" pitchFamily="18" charset="0"/>
                 <a:cs typeface="Times New Roman" pitchFamily="18" charset="0"/>
               </a:rPr>
               <a:t>Hình</a:t>
             </a:r>
             <a:r>
-              <a:rPr lang="en-US" dirty="0" smtClean="0">
+              <a:rPr lang="en-US" b="1" dirty="0" smtClean="0">
                 <a:latin typeface="Times New Roman" pitchFamily="18" charset="0"/>
                 <a:cs typeface="Times New Roman" pitchFamily="18" charset="0"/>
               </a:rPr>
               <a:t> 2.3 </a:t>
             </a:r>
             <a:r>
-              <a:rPr lang="en-US" dirty="0" err="1" smtClean="0">
+              <a:rPr lang="en-US" b="1" dirty="0" err="1" smtClean="0">
                 <a:latin typeface="Times New Roman" pitchFamily="18" charset="0"/>
                 <a:cs typeface="Times New Roman" pitchFamily="18" charset="0"/>
               </a:rPr>
               <a:t>Kịch</a:t>
             </a:r>
             <a:r>
-              <a:rPr lang="en-US" dirty="0" smtClean="0">
-                <a:latin typeface="Times New Roman" pitchFamily="18" charset="0"/>
-                <a:cs typeface="Times New Roman" pitchFamily="18" charset="0"/>
-              </a:rPr>
-              <a:t> </a:t>
-            </a:r>
-            <a:r>
-              <a:rPr lang="en-US" dirty="0" err="1" smtClean="0">
+              <a:rPr lang="en-US" b="1" dirty="0" smtClean="0">
+                <a:latin typeface="Times New Roman" pitchFamily="18" charset="0"/>
+                <a:cs typeface="Times New Roman" pitchFamily="18" charset="0"/>
+              </a:rPr>
+              <a:t> </a:t>
+            </a:r>
+            <a:r>
+              <a:rPr lang="en-US" b="1" dirty="0" err="1" smtClean="0">
                 <a:latin typeface="Times New Roman" pitchFamily="18" charset="0"/>
                 <a:cs typeface="Times New Roman" pitchFamily="18" charset="0"/>
               </a:rPr>
               <a:t>bản</a:t>
             </a:r>
             <a:r>
-              <a:rPr lang="en-US" dirty="0" smtClean="0">
-                <a:latin typeface="Times New Roman" pitchFamily="18" charset="0"/>
-                <a:cs typeface="Times New Roman" pitchFamily="18" charset="0"/>
-              </a:rPr>
-              <a:t> </a:t>
-            </a:r>
-            <a:r>
-              <a:rPr lang="en-US" dirty="0" err="1" smtClean="0">
+              <a:rPr lang="en-US" b="1" dirty="0" smtClean="0">
+                <a:latin typeface="Times New Roman" pitchFamily="18" charset="0"/>
+                <a:cs typeface="Times New Roman" pitchFamily="18" charset="0"/>
+              </a:rPr>
+              <a:t> </a:t>
+            </a:r>
+            <a:r>
+              <a:rPr lang="en-US" b="1" dirty="0" err="1" smtClean="0">
                 <a:latin typeface="Times New Roman" pitchFamily="18" charset="0"/>
                 <a:cs typeface="Times New Roman" pitchFamily="18" charset="0"/>
               </a:rPr>
               <a:t>và</a:t>
             </a:r>
             <a:r>
-              <a:rPr lang="en-US" dirty="0" smtClean="0">
-                <a:latin typeface="Times New Roman" pitchFamily="18" charset="0"/>
-                <a:cs typeface="Times New Roman" pitchFamily="18" charset="0"/>
-              </a:rPr>
-              <a:t> </a:t>
-            </a:r>
-            <a:r>
-              <a:rPr lang="en-US" dirty="0" err="1" smtClean="0">
+              <a:rPr lang="en-US" b="1" dirty="0" smtClean="0">
+                <a:latin typeface="Times New Roman" pitchFamily="18" charset="0"/>
+                <a:cs typeface="Times New Roman" pitchFamily="18" charset="0"/>
+              </a:rPr>
+              <a:t> </a:t>
+            </a:r>
+            <a:r>
+              <a:rPr lang="en-US" b="1" dirty="0" err="1" smtClean="0">
                 <a:latin typeface="Times New Roman" pitchFamily="18" charset="0"/>
                 <a:cs typeface="Times New Roman" pitchFamily="18" charset="0"/>
               </a:rPr>
               <a:t>biểu</a:t>
             </a:r>
             <a:r>
-              <a:rPr lang="en-US" dirty="0" smtClean="0">
-                <a:latin typeface="Times New Roman" pitchFamily="18" charset="0"/>
-                <a:cs typeface="Times New Roman" pitchFamily="18" charset="0"/>
-              </a:rPr>
-              <a:t> </a:t>
-            </a:r>
-            <a:r>
-              <a:rPr lang="en-US" dirty="0" err="1" smtClean="0">
+              <a:rPr lang="en-US" b="1" dirty="0" smtClean="0">
+                <a:latin typeface="Times New Roman" pitchFamily="18" charset="0"/>
+                <a:cs typeface="Times New Roman" pitchFamily="18" charset="0"/>
+              </a:rPr>
+              <a:t> </a:t>
+            </a:r>
+            <a:r>
+              <a:rPr lang="en-US" b="1" dirty="0" err="1" smtClean="0">
                 <a:latin typeface="Times New Roman" pitchFamily="18" charset="0"/>
                 <a:cs typeface="Times New Roman" pitchFamily="18" charset="0"/>
               </a:rPr>
               <a:t>đồ</a:t>
             </a:r>
             <a:r>
-              <a:rPr lang="en-US" dirty="0" smtClean="0">
-                <a:latin typeface="Times New Roman" pitchFamily="18" charset="0"/>
-                <a:cs typeface="Times New Roman" pitchFamily="18" charset="0"/>
-              </a:rPr>
-              <a:t> </a:t>
-            </a:r>
-            <a:r>
-              <a:rPr lang="en-US" dirty="0" err="1" smtClean="0">
+              <a:rPr lang="en-US" b="1" dirty="0" smtClean="0">
+                <a:latin typeface="Times New Roman" pitchFamily="18" charset="0"/>
+                <a:cs typeface="Times New Roman" pitchFamily="18" charset="0"/>
+              </a:rPr>
+              <a:t> </a:t>
+            </a:r>
+            <a:r>
+              <a:rPr lang="en-US" b="1" dirty="0" err="1" smtClean="0">
                 <a:latin typeface="Times New Roman" pitchFamily="18" charset="0"/>
                 <a:cs typeface="Times New Roman" pitchFamily="18" charset="0"/>
               </a:rPr>
               <a:t>tuần</a:t>
             </a:r>
             <a:r>
-              <a:rPr lang="en-US" dirty="0" smtClean="0">
-                <a:latin typeface="Times New Roman" pitchFamily="18" charset="0"/>
-                <a:cs typeface="Times New Roman" pitchFamily="18" charset="0"/>
-              </a:rPr>
-              <a:t> </a:t>
-            </a:r>
-            <a:r>
-              <a:rPr lang="en-US" dirty="0" err="1" smtClean="0">
+              <a:rPr lang="en-US" b="1" dirty="0" smtClean="0">
+                <a:latin typeface="Times New Roman" pitchFamily="18" charset="0"/>
+                <a:cs typeface="Times New Roman" pitchFamily="18" charset="0"/>
+              </a:rPr>
+              <a:t> </a:t>
+            </a:r>
+            <a:r>
+              <a:rPr lang="en-US" b="1" dirty="0" err="1" smtClean="0">
                 <a:latin typeface="Times New Roman" pitchFamily="18" charset="0"/>
                 <a:cs typeface="Times New Roman" pitchFamily="18" charset="0"/>
               </a:rPr>
               <a:t>tự</a:t>
             </a:r>
             <a:r>
-              <a:rPr lang="en-US" dirty="0" smtClean="0">
-                <a:latin typeface="Times New Roman" pitchFamily="18" charset="0"/>
-                <a:cs typeface="Times New Roman" pitchFamily="18" charset="0"/>
-              </a:rPr>
-              <a:t> </a:t>
-            </a:r>
-            <a:r>
-              <a:rPr lang="en-US" dirty="0" err="1" smtClean="0">
+              <a:rPr lang="en-US" b="1" dirty="0" smtClean="0">
+                <a:latin typeface="Times New Roman" pitchFamily="18" charset="0"/>
+                <a:cs typeface="Times New Roman" pitchFamily="18" charset="0"/>
+              </a:rPr>
+              <a:t> </a:t>
+            </a:r>
+            <a:r>
+              <a:rPr lang="en-US" b="1" dirty="0" err="1" smtClean="0">
                 <a:latin typeface="Times New Roman" pitchFamily="18" charset="0"/>
                 <a:cs typeface="Times New Roman" pitchFamily="18" charset="0"/>
               </a:rPr>
               <a:t>chức</a:t>
             </a:r>
             <a:r>
-              <a:rPr lang="en-US" dirty="0" smtClean="0">
-                <a:latin typeface="Times New Roman" pitchFamily="18" charset="0"/>
-                <a:cs typeface="Times New Roman" pitchFamily="18" charset="0"/>
-              </a:rPr>
-              <a:t> </a:t>
-            </a:r>
-            <a:r>
-              <a:rPr lang="en-US" dirty="0" err="1" smtClean="0">
+              <a:rPr lang="en-US" b="1" dirty="0" smtClean="0">
+                <a:latin typeface="Times New Roman" pitchFamily="18" charset="0"/>
+                <a:cs typeface="Times New Roman" pitchFamily="18" charset="0"/>
+              </a:rPr>
+              <a:t> </a:t>
+            </a:r>
+            <a:r>
+              <a:rPr lang="en-US" b="1" dirty="0" err="1" smtClean="0">
                 <a:latin typeface="Times New Roman" pitchFamily="18" charset="0"/>
                 <a:cs typeface="Times New Roman" pitchFamily="18" charset="0"/>
               </a:rPr>
               <a:t>năng</a:t>
             </a:r>
             <a:r>
-              <a:rPr lang="en-US" dirty="0" smtClean="0">
-                <a:latin typeface="Times New Roman" pitchFamily="18" charset="0"/>
-                <a:cs typeface="Times New Roman" pitchFamily="18" charset="0"/>
-              </a:rPr>
-              <a:t> </a:t>
-            </a:r>
-            <a:r>
-              <a:rPr lang="en-US" dirty="0" err="1" smtClean="0">
+              <a:rPr lang="en-US" b="1" dirty="0" smtClean="0">
+                <a:latin typeface="Times New Roman" pitchFamily="18" charset="0"/>
+                <a:cs typeface="Times New Roman" pitchFamily="18" charset="0"/>
+              </a:rPr>
+              <a:t> </a:t>
+            </a:r>
+            <a:r>
+              <a:rPr lang="en-US" b="1" dirty="0" err="1" smtClean="0">
                 <a:latin typeface="Times New Roman" pitchFamily="18" charset="0"/>
                 <a:cs typeface="Times New Roman" pitchFamily="18" charset="0"/>
               </a:rPr>
               <a:t>thêm</a:t>
             </a:r>
             <a:r>
-              <a:rPr lang="en-US" dirty="0" smtClean="0">
-                <a:latin typeface="Times New Roman" pitchFamily="18" charset="0"/>
-                <a:cs typeface="Times New Roman" pitchFamily="18" charset="0"/>
-              </a:rPr>
-              <a:t> </a:t>
-            </a:r>
-            <a:r>
-              <a:rPr lang="en-US" dirty="0" err="1" smtClean="0">
+              <a:rPr lang="en-US" b="1" dirty="0" smtClean="0">
+                <a:latin typeface="Times New Roman" pitchFamily="18" charset="0"/>
+                <a:cs typeface="Times New Roman" pitchFamily="18" charset="0"/>
+              </a:rPr>
+              <a:t> </a:t>
+            </a:r>
+            <a:r>
+              <a:rPr lang="en-US" b="1" dirty="0" err="1" smtClean="0">
                 <a:latin typeface="Times New Roman" pitchFamily="18" charset="0"/>
                 <a:cs typeface="Times New Roman" pitchFamily="18" charset="0"/>
               </a:rPr>
               <a:t>bộ</a:t>
             </a:r>
             <a:r>
-              <a:rPr lang="en-US" dirty="0" smtClean="0">
-                <a:latin typeface="Times New Roman" pitchFamily="18" charset="0"/>
-                <a:cs typeface="Times New Roman" pitchFamily="18" charset="0"/>
-              </a:rPr>
-              <a:t> </a:t>
-            </a:r>
-            <a:r>
-              <a:rPr lang="en-US" dirty="0" err="1" smtClean="0">
+              <a:rPr lang="en-US" b="1" dirty="0" smtClean="0">
+                <a:latin typeface="Times New Roman" pitchFamily="18" charset="0"/>
+                <a:cs typeface="Times New Roman" pitchFamily="18" charset="0"/>
+              </a:rPr>
+              <a:t> </a:t>
+            </a:r>
+            <a:r>
+              <a:rPr lang="en-US" b="1" dirty="0" err="1" smtClean="0">
                 <a:latin typeface="Times New Roman" pitchFamily="18" charset="0"/>
                 <a:cs typeface="Times New Roman" pitchFamily="18" charset="0"/>
               </a:rPr>
               <a:t>thẻ</a:t>
             </a:r>
-            <a:endParaRPr lang="en-US" dirty="0">
+            <a:endParaRPr lang="en-US" b="1" dirty="0">
               <a:latin typeface="Times New Roman" pitchFamily="18" charset="0"/>
               <a:cs typeface="Times New Roman" pitchFamily="18" charset="0"/>
             </a:endParaRPr>
@@ -16006,14 +16111,7 @@
                 <a:latin typeface="Times New Roman" pitchFamily="18" charset="0"/>
                 <a:cs typeface="Times New Roman" pitchFamily="18" charset="0"/>
               </a:rPr>
-              <a:t> </a:t>
-            </a:r>
-            <a:r>
-              <a:rPr lang="en-US" dirty="0" smtClean="0">
-                <a:latin typeface="Times New Roman" pitchFamily="18" charset="0"/>
-                <a:cs typeface="Times New Roman" pitchFamily="18" charset="0"/>
-              </a:rPr>
-              <a:t>2.4 </a:t>
+              <a:t> 2.4 </a:t>
             </a:r>
             <a:r>
               <a:rPr lang="en-US" dirty="0" err="1" smtClean="0">
@@ -16280,69 +16378,62 @@
           <a:p>
             <a:pPr algn="ctr"/>
             <a:r>
-              <a:rPr lang="en-US" dirty="0" err="1" smtClean="0">
+              <a:rPr lang="en-US" b="1" dirty="0" err="1" smtClean="0">
                 <a:latin typeface="Times New Roman" pitchFamily="18" charset="0"/>
                 <a:cs typeface="Times New Roman" pitchFamily="18" charset="0"/>
               </a:rPr>
               <a:t>Hình</a:t>
             </a:r>
             <a:r>
-              <a:rPr lang="en-US" dirty="0" smtClean="0">
-                <a:latin typeface="Times New Roman" pitchFamily="18" charset="0"/>
-                <a:cs typeface="Times New Roman" pitchFamily="18" charset="0"/>
-              </a:rPr>
-              <a:t> </a:t>
-            </a:r>
-            <a:r>
-              <a:rPr lang="en-US" dirty="0" smtClean="0">
-                <a:latin typeface="Times New Roman" pitchFamily="18" charset="0"/>
-                <a:cs typeface="Times New Roman" pitchFamily="18" charset="0"/>
-              </a:rPr>
-              <a:t>2.5 </a:t>
-            </a:r>
-            <a:r>
-              <a:rPr lang="en-US" dirty="0" err="1" smtClean="0">
+              <a:rPr lang="en-US" b="1" dirty="0" smtClean="0">
+                <a:latin typeface="Times New Roman" pitchFamily="18" charset="0"/>
+                <a:cs typeface="Times New Roman" pitchFamily="18" charset="0"/>
+              </a:rPr>
+              <a:t> 2.5 </a:t>
+            </a:r>
+            <a:r>
+              <a:rPr lang="en-US" b="1" dirty="0" err="1" smtClean="0">
                 <a:latin typeface="Times New Roman" pitchFamily="18" charset="0"/>
                 <a:cs typeface="Times New Roman" pitchFamily="18" charset="0"/>
               </a:rPr>
               <a:t>Luồng</a:t>
             </a:r>
             <a:r>
-              <a:rPr lang="en-US" dirty="0" smtClean="0">
-                <a:latin typeface="Times New Roman" pitchFamily="18" charset="0"/>
-                <a:cs typeface="Times New Roman" pitchFamily="18" charset="0"/>
-              </a:rPr>
-              <a:t> </a:t>
-            </a:r>
-            <a:r>
-              <a:rPr lang="en-US" dirty="0" err="1" smtClean="0">
+              <a:rPr lang="en-US" b="1" dirty="0" smtClean="0">
+                <a:latin typeface="Times New Roman" pitchFamily="18" charset="0"/>
+                <a:cs typeface="Times New Roman" pitchFamily="18" charset="0"/>
+              </a:rPr>
+              <a:t> </a:t>
+            </a:r>
+            <a:r>
+              <a:rPr lang="en-US" b="1" dirty="0" err="1" smtClean="0">
                 <a:latin typeface="Times New Roman" pitchFamily="18" charset="0"/>
                 <a:cs typeface="Times New Roman" pitchFamily="18" charset="0"/>
               </a:rPr>
               <a:t>hoạt</a:t>
             </a:r>
             <a:r>
-              <a:rPr lang="en-US" dirty="0" smtClean="0">
-                <a:latin typeface="Times New Roman" pitchFamily="18" charset="0"/>
-                <a:cs typeface="Times New Roman" pitchFamily="18" charset="0"/>
-              </a:rPr>
-              <a:t> </a:t>
-            </a:r>
-            <a:r>
-              <a:rPr lang="en-US" dirty="0" err="1" smtClean="0">
+              <a:rPr lang="en-US" b="1" dirty="0" smtClean="0">
+                <a:latin typeface="Times New Roman" pitchFamily="18" charset="0"/>
+                <a:cs typeface="Times New Roman" pitchFamily="18" charset="0"/>
+              </a:rPr>
+              <a:t> </a:t>
+            </a:r>
+            <a:r>
+              <a:rPr lang="en-US" b="1" dirty="0" err="1" smtClean="0">
                 <a:latin typeface="Times New Roman" pitchFamily="18" charset="0"/>
                 <a:cs typeface="Times New Roman" pitchFamily="18" charset="0"/>
               </a:rPr>
               <a:t>động</a:t>
             </a:r>
             <a:r>
-              <a:rPr lang="en-US" dirty="0" smtClean="0">
-                <a:latin typeface="Times New Roman" pitchFamily="18" charset="0"/>
-                <a:cs typeface="Times New Roman" pitchFamily="18" charset="0"/>
-              </a:rPr>
-              <a:t> </a:t>
-            </a:r>
-            <a:endParaRPr lang="en-US" dirty="0">
+              <a:rPr lang="en-US" b="1" dirty="0" smtClean="0">
+                <a:latin typeface="Times New Roman" pitchFamily="18" charset="0"/>
+                <a:cs typeface="Times New Roman" pitchFamily="18" charset="0"/>
+              </a:rPr>
+              <a:t> </a:t>
+            </a:r>
+            <a:endParaRPr lang="en-US" b="1" dirty="0">
               <a:latin typeface="Times New Roman" pitchFamily="18" charset="0"/>
               <a:cs typeface="Times New Roman" pitchFamily="18" charset="0"/>
             </a:endParaRPr>
